--- a/光和工業_ビジョン資料.pptx
+++ b/光和工業_ビジョン資料.pptx
@@ -15,9 +15,11 @@
     <p:sldId id="263" r:id="rId9"/>
     <p:sldId id="264" r:id="rId10"/>
     <p:sldId id="265" r:id="rId11"/>
+    <p:sldId id="266" r:id="rId12"/>
+    <p:sldId id="267" r:id="rId13"/>
   </p:sldIdLst>
   <p:notesMasterIdLst>
-    <p:notesMasterId r:id="rId12"/>
+    <p:notesMasterId r:id="rId14"/>
   </p:notesMasterIdLst>
   <p:sldSz cx="12191695" cy="6858000"/>
   <p:notesSz cx="6858000" cy="12191695"/>
@@ -641,6 +643,182 @@
 </p:notes>
 </file>
 
+<file path=ppt/notesSlides/notesSlide11.xml><?xml version="1.0" encoding="utf-8"?>
+<p:notes xmlns:a="http://schemas.openxmlformats.org/drawingml/2006/main" xmlns:r="http://schemas.openxmlformats.org/officeDocument/2006/relationships" xmlns:p="http://schemas.openxmlformats.org/presentationml/2006/main">
+  <p:cSld>
+    <p:spTree>
+      <p:nvGrpSpPr>
+        <p:cNvPr id="1" name=""/>
+        <p:cNvGrpSpPr/>
+        <p:nvPr/>
+      </p:nvGrpSpPr>
+      <p:grpSpPr>
+        <a:xfrm>
+          <a:off x="0" y="0"/>
+          <a:ext cx="0" cy="0"/>
+          <a:chOff x="0" y="0"/>
+          <a:chExt cx="0" cy="0"/>
+        </a:xfrm>
+      </p:grpSpPr>
+      <p:sp>
+        <p:nvSpPr>
+          <p:cNvPr id="2" name="Slide Image Placeholder 1"/>
+          <p:cNvSpPr>
+            <a:spLocks noGrp="1" noRot="1" noChangeAspect="1"/>
+          </p:cNvSpPr>
+          <p:nvPr>
+            <p:ph type="sldImg"/>
+          </p:nvPr>
+        </p:nvSpPr>
+        <p:spPr/>
+      </p:sp>
+      <p:sp>
+        <p:nvSpPr>
+          <p:cNvPr id="3" name="Notes Placeholder 2"/>
+          <p:cNvSpPr>
+            <a:spLocks noGrp="1"/>
+          </p:cNvSpPr>
+          <p:nvPr>
+            <p:ph type="body" idx="1"/>
+          </p:nvPr>
+        </p:nvSpPr>
+        <p:spPr/>
+        <p:txBody>
+          <a:bodyPr/>
+          <a:lstStyle/>
+          <a:p>
+            <a:r>
+              <a:rPr lang="en-US" dirty="0"/>
+              <a:t/>
+            </a:r>
+            <a:endParaRPr lang="en-US" dirty="0"/>
+          </a:p>
+        </p:txBody>
+      </p:sp>
+      <p:sp>
+        <p:nvSpPr>
+          <p:cNvPr id="4" name="Slide Number Placeholder 3"/>
+          <p:cNvSpPr>
+            <a:spLocks noGrp="1"/>
+          </p:cNvSpPr>
+          <p:nvPr>
+            <p:ph type="sldNum" sz="quarter" idx="10"/>
+          </p:nvPr>
+        </p:nvSpPr>
+        <p:spPr/>
+        <p:txBody>
+          <a:bodyPr/>
+          <a:lstStyle/>
+          <a:p>
+            <a:fld id="{F7021451-1387-4CA6-816F-3879F97B5CBC}" type="slidenum">
+              <a:rPr lang="en-US"/>
+              <a:t>11</a:t>
+            </a:fld>
+            <a:endParaRPr lang="en-US"/>
+          </a:p>
+        </p:txBody>
+      </p:sp>
+    </p:spTree>
+    <p:extLst>
+      <p:ext uri="{BB962C8B-B14F-4D97-AF65-F5344CB8AC3E}">
+        <p14:creationId xmlns:p14="http://schemas.microsoft.com/office/powerpoint/2010/main" val="1024086991"/>
+      </p:ext>
+    </p:extLst>
+  </p:cSld>
+  <p:clrMapOvr>
+    <a:masterClrMapping/>
+  </p:clrMapOvr>
+</p:notes>
+</file>
+
+<file path=ppt/notesSlides/notesSlide12.xml><?xml version="1.0" encoding="utf-8"?>
+<p:notes xmlns:a="http://schemas.openxmlformats.org/drawingml/2006/main" xmlns:r="http://schemas.openxmlformats.org/officeDocument/2006/relationships" xmlns:p="http://schemas.openxmlformats.org/presentationml/2006/main">
+  <p:cSld>
+    <p:spTree>
+      <p:nvGrpSpPr>
+        <p:cNvPr id="1" name=""/>
+        <p:cNvGrpSpPr/>
+        <p:nvPr/>
+      </p:nvGrpSpPr>
+      <p:grpSpPr>
+        <a:xfrm>
+          <a:off x="0" y="0"/>
+          <a:ext cx="0" cy="0"/>
+          <a:chOff x="0" y="0"/>
+          <a:chExt cx="0" cy="0"/>
+        </a:xfrm>
+      </p:grpSpPr>
+      <p:sp>
+        <p:nvSpPr>
+          <p:cNvPr id="2" name="Slide Image Placeholder 1"/>
+          <p:cNvSpPr>
+            <a:spLocks noGrp="1" noRot="1" noChangeAspect="1"/>
+          </p:cNvSpPr>
+          <p:nvPr>
+            <p:ph type="sldImg"/>
+          </p:nvPr>
+        </p:nvSpPr>
+        <p:spPr/>
+      </p:sp>
+      <p:sp>
+        <p:nvSpPr>
+          <p:cNvPr id="3" name="Notes Placeholder 2"/>
+          <p:cNvSpPr>
+            <a:spLocks noGrp="1"/>
+          </p:cNvSpPr>
+          <p:nvPr>
+            <p:ph type="body" idx="1"/>
+          </p:nvPr>
+        </p:nvSpPr>
+        <p:spPr/>
+        <p:txBody>
+          <a:bodyPr/>
+          <a:lstStyle/>
+          <a:p>
+            <a:r>
+              <a:rPr lang="en-US" dirty="0"/>
+              <a:t/>
+            </a:r>
+            <a:endParaRPr lang="en-US" dirty="0"/>
+          </a:p>
+        </p:txBody>
+      </p:sp>
+      <p:sp>
+        <p:nvSpPr>
+          <p:cNvPr id="4" name="Slide Number Placeholder 3"/>
+          <p:cNvSpPr>
+            <a:spLocks noGrp="1"/>
+          </p:cNvSpPr>
+          <p:nvPr>
+            <p:ph type="sldNum" sz="quarter" idx="10"/>
+          </p:nvPr>
+        </p:nvSpPr>
+        <p:spPr/>
+        <p:txBody>
+          <a:bodyPr/>
+          <a:lstStyle/>
+          <a:p>
+            <a:fld id="{F7021451-1387-4CA6-816F-3879F97B5CBC}" type="slidenum">
+              <a:rPr lang="en-US"/>
+              <a:t>12</a:t>
+            </a:fld>
+            <a:endParaRPr lang="en-US"/>
+          </a:p>
+        </p:txBody>
+      </p:sp>
+    </p:spTree>
+    <p:extLst>
+      <p:ext uri="{BB962C8B-B14F-4D97-AF65-F5344CB8AC3E}">
+        <p14:creationId xmlns:p14="http://schemas.microsoft.com/office/powerpoint/2010/main" val="1024086991"/>
+      </p:ext>
+    </p:extLst>
+  </p:cSld>
+  <p:clrMapOvr>
+    <a:masterClrMapping/>
+  </p:clrMapOvr>
+</p:notes>
+</file>
+
 <file path=ppt/notesSlides/notesSlide2.xml><?xml version="1.0" encoding="utf-8"?>
 <p:notes xmlns:a="http://schemas.openxmlformats.org/drawingml/2006/main" xmlns:r="http://schemas.openxmlformats.org/officeDocument/2006/relationships" xmlns:p="http://schemas.openxmlformats.org/presentationml/2006/main">
   <p:cSld>
@@ -2184,7 +2362,7 @@
                   <a:srgbClr val="C9742E"/>
                 </a:solidFill>
               </a:rPr>
-              <a:t>みんなへ</a:t>
+              <a:t>数字で見る目標</a:t>
             </a:r>
             <a:endParaRPr lang="en-US" sz="1300" dirty="0"/>
           </a:p>
@@ -2220,7 +2398,7 @@
                   <a:srgbClr val="2C5F2D"/>
                 </a:solidFill>
               </a:rPr>
-              <a:t>変わるのは「数」じゃない。社会との“つながり”が広がること。</a:t>
+              <a:t>現在地は約4.65億円。目指すは、年商7億円。</a:t>
             </a:r>
             <a:endParaRPr lang="en-US" sz="2700" dirty="0"/>
           </a:p>
@@ -2280,6 +2458,1484 @@
                 </a:solidFill>
               </a:rPr>
               <a:t>10</a:t>
+            </a:r>
+            <a:endParaRPr lang="en-US" sz="1100" dirty="0"/>
+          </a:p>
+        </p:txBody>
+      </p:sp>
+      <p:sp>
+        <p:nvSpPr>
+          <p:cNvPr id="7" name="Text 5"/>
+          <p:cNvSpPr/>
+          <p:nvPr/>
+        </p:nvSpPr>
+        <p:spPr>
+          <a:xfrm>
+            <a:off x="914400" y="1783080"/>
+            <a:ext cx="4160520" cy="960120"/>
+          </a:xfrm>
+          <a:prstGeom prst="roundRect">
+            <a:avLst>
+              <a:gd name="adj" fmla="val 9524"/>
+            </a:avLst>
+          </a:prstGeom>
+          <a:solidFill>
+            <a:srgbClr val="36454F"/>
+          </a:solidFill>
+          <a:ln/>
+        </p:spPr>
+        <p:txBody>
+          <a:bodyPr wrap="square" rtlCol="0" anchor="ctr"/>
+          <a:lstStyle/>
+          <a:p>
+            <a:pPr algn="ctr" indent="0" marL="0">
+              <a:lnSpc>
+                <a:spcPct val="100000"/>
+              </a:lnSpc>
+              <a:buNone/>
+            </a:pPr>
+            <a:r>
+              <a:rPr lang="en-US" sz="1300" b="1" dirty="0">
+                <a:solidFill>
+                  <a:srgbClr val="D8DDE0"/>
+                </a:solidFill>
+              </a:rPr>
+              <a:t>現在地　</a:t>
+            </a:r>
+            <a:pPr algn="ctr" indent="0" marL="0">
+              <a:lnSpc>
+                <a:spcPct val="100000"/>
+              </a:lnSpc>
+              <a:buNone/>
+            </a:pPr>
+            <a:r>
+              <a:rPr lang="en-US" sz="2400" b="1" dirty="0">
+                <a:solidFill>
+                  <a:srgbClr val="FFFFFF"/>
+                </a:solidFill>
+              </a:rPr>
+              <a:t>約4.65億円</a:t>
+            </a:r>
+            <a:endParaRPr lang="en-US" sz="1300" dirty="0"/>
+          </a:p>
+          <a:p>
+            <a:pPr algn="ctr" indent="0" marL="0">
+              <a:lnSpc>
+                <a:spcPct val="100000"/>
+              </a:lnSpc>
+              <a:buNone/>
+            </a:pPr>
+            <a:r>
+              <a:rPr lang="en-US" sz="950" dirty="0">
+                <a:solidFill>
+                  <a:srgbClr val="D8DDE0"/>
+                </a:solidFill>
+              </a:rPr>
+              <a:t>第26期（R6.7〜R7.6）売上高</a:t>
+            </a:r>
+            <a:endParaRPr lang="en-US" sz="1300" dirty="0"/>
+          </a:p>
+        </p:txBody>
+      </p:sp>
+      <p:sp>
+        <p:nvSpPr>
+          <p:cNvPr id="8" name="Text 6"/>
+          <p:cNvSpPr/>
+          <p:nvPr/>
+        </p:nvSpPr>
+        <p:spPr>
+          <a:xfrm>
+            <a:off x="5166360" y="1783080"/>
+            <a:ext cx="1828800" cy="960120"/>
+          </a:xfrm>
+          <a:prstGeom prst="rect">
+            <a:avLst/>
+          </a:prstGeom>
+          <a:noFill/>
+          <a:ln/>
+        </p:spPr>
+        <p:txBody>
+          <a:bodyPr wrap="square" rtlCol="0" anchor="ctr"/>
+          <a:lstStyle/>
+          <a:p>
+            <a:pPr algn="ctr" indent="0" marL="0">
+              <a:lnSpc>
+                <a:spcPct val="100000"/>
+              </a:lnSpc>
+              <a:buNone/>
+            </a:pPr>
+            <a:r>
+              <a:rPr lang="en-US" sz="1400" b="1" dirty="0">
+                <a:solidFill>
+                  <a:srgbClr val="C9742E"/>
+                </a:solidFill>
+              </a:rPr>
+              <a:t>＋2.35億</a:t>
+            </a:r>
+            <a:endParaRPr lang="en-US" sz="1400" dirty="0"/>
+          </a:p>
+          <a:p>
+            <a:pPr algn="ctr" indent="0" marL="0">
+              <a:lnSpc>
+                <a:spcPct val="100000"/>
+              </a:lnSpc>
+              <a:buNone/>
+            </a:pPr>
+            <a:r>
+              <a:rPr lang="en-US" sz="3000" b="1" dirty="0">
+                <a:solidFill>
+                  <a:srgbClr val="2C5F2D"/>
+                </a:solidFill>
+              </a:rPr>
+              <a:t>›</a:t>
+            </a:r>
+            <a:endParaRPr lang="en-US" sz="1400" dirty="0"/>
+          </a:p>
+        </p:txBody>
+      </p:sp>
+      <p:sp>
+        <p:nvSpPr>
+          <p:cNvPr id="9" name="Text 7"/>
+          <p:cNvSpPr/>
+          <p:nvPr/>
+        </p:nvSpPr>
+        <p:spPr>
+          <a:xfrm>
+            <a:off x="7086600" y="1783080"/>
+            <a:ext cx="4160520" cy="960120"/>
+          </a:xfrm>
+          <a:prstGeom prst="roundRect">
+            <a:avLst>
+              <a:gd name="adj" fmla="val 9524"/>
+            </a:avLst>
+          </a:prstGeom>
+          <a:solidFill>
+            <a:srgbClr val="2C5F2D"/>
+          </a:solidFill>
+          <a:ln/>
+        </p:spPr>
+        <p:txBody>
+          <a:bodyPr wrap="square" rtlCol="0" anchor="ctr"/>
+          <a:lstStyle/>
+          <a:p>
+            <a:pPr algn="ctr" indent="0" marL="0">
+              <a:lnSpc>
+                <a:spcPct val="100000"/>
+              </a:lnSpc>
+              <a:buNone/>
+            </a:pPr>
+            <a:r>
+              <a:rPr lang="en-US" sz="1300" b="1" dirty="0">
+                <a:solidFill>
+                  <a:srgbClr val="CFE3CF"/>
+                </a:solidFill>
+              </a:rPr>
+              <a:t>目標　</a:t>
+            </a:r>
+            <a:pPr algn="ctr" indent="0" marL="0">
+              <a:lnSpc>
+                <a:spcPct val="100000"/>
+              </a:lnSpc>
+              <a:buNone/>
+            </a:pPr>
+            <a:r>
+              <a:rPr lang="en-US" sz="2600" b="1" dirty="0">
+                <a:solidFill>
+                  <a:srgbClr val="FFFFFF"/>
+                </a:solidFill>
+              </a:rPr>
+              <a:t>7億円</a:t>
+            </a:r>
+            <a:endParaRPr lang="en-US" sz="1300" dirty="0"/>
+          </a:p>
+          <a:p>
+            <a:pPr algn="ctr" indent="0" marL="0">
+              <a:lnSpc>
+                <a:spcPct val="100000"/>
+              </a:lnSpc>
+              <a:buNone/>
+            </a:pPr>
+            <a:r>
+              <a:rPr lang="en-US" sz="950" dirty="0">
+                <a:solidFill>
+                  <a:srgbClr val="CFE3CF"/>
+                </a:solidFill>
+              </a:rPr>
+              <a:t>5事業の合計で</a:t>
+            </a:r>
+            <a:endParaRPr lang="en-US" sz="1300" dirty="0"/>
+          </a:p>
+        </p:txBody>
+      </p:sp>
+      <p:sp>
+        <p:nvSpPr>
+          <p:cNvPr id="10" name="Text 8"/>
+          <p:cNvSpPr/>
+          <p:nvPr/>
+        </p:nvSpPr>
+        <p:spPr>
+          <a:xfrm>
+            <a:off x="914400" y="2971800"/>
+            <a:ext cx="10332720" cy="292608"/>
+          </a:xfrm>
+          <a:prstGeom prst="rect">
+            <a:avLst/>
+          </a:prstGeom>
+          <a:noFill/>
+          <a:ln/>
+        </p:spPr>
+        <p:txBody>
+          <a:bodyPr wrap="square" rtlCol="0" anchor="ctr"/>
+          <a:lstStyle/>
+          <a:p>
+            <a:pPr algn="l" indent="0" marL="0">
+              <a:buNone/>
+            </a:pPr>
+            <a:r>
+              <a:rPr lang="en-US" sz="1200" b="1" dirty="0">
+                <a:solidFill>
+                  <a:srgbClr val="36454F"/>
+                </a:solidFill>
+              </a:rPr>
+              <a:t>目標 7億円の内訳</a:t>
+            </a:r>
+            <a:endParaRPr lang="en-US" sz="1200" dirty="0"/>
+          </a:p>
+        </p:txBody>
+      </p:sp>
+      <p:sp>
+        <p:nvSpPr>
+          <p:cNvPr id="11" name="Text 9"/>
+          <p:cNvSpPr/>
+          <p:nvPr/>
+        </p:nvSpPr>
+        <p:spPr>
+          <a:xfrm>
+            <a:off x="914400" y="3310128"/>
+            <a:ext cx="4428309" cy="749808"/>
+          </a:xfrm>
+          <a:prstGeom prst="roundRect">
+            <a:avLst>
+              <a:gd name="adj" fmla="val 4878"/>
+            </a:avLst>
+          </a:prstGeom>
+          <a:solidFill>
+            <a:srgbClr val="1C7293"/>
+          </a:solidFill>
+          <a:ln/>
+        </p:spPr>
+        <p:txBody>
+          <a:bodyPr wrap="square" rtlCol="0" anchor="ctr"/>
+          <a:lstStyle/>
+          <a:p>
+            <a:pPr algn="ctr" indent="0" marL="0">
+              <a:buNone/>
+            </a:pPr>
+            <a:r>
+              <a:rPr lang="en-US" sz="1600" b="1" dirty="0">
+                <a:solidFill>
+                  <a:srgbClr val="FFFFFF"/>
+                </a:solidFill>
+              </a:rPr>
+              <a:t>3億</a:t>
+            </a:r>
+            <a:endParaRPr lang="en-US" sz="1600" dirty="0"/>
+          </a:p>
+        </p:txBody>
+      </p:sp>
+      <p:sp>
+        <p:nvSpPr>
+          <p:cNvPr id="12" name="Text 10"/>
+          <p:cNvSpPr/>
+          <p:nvPr/>
+        </p:nvSpPr>
+        <p:spPr>
+          <a:xfrm>
+            <a:off x="5342709" y="3310128"/>
+            <a:ext cx="2952206" cy="749808"/>
+          </a:xfrm>
+          <a:prstGeom prst="roundRect">
+            <a:avLst>
+              <a:gd name="adj" fmla="val 4878"/>
+            </a:avLst>
+          </a:prstGeom>
+          <a:solidFill>
+            <a:srgbClr val="C9742E"/>
+          </a:solidFill>
+          <a:ln/>
+        </p:spPr>
+        <p:txBody>
+          <a:bodyPr wrap="square" rtlCol="0" anchor="ctr"/>
+          <a:lstStyle/>
+          <a:p>
+            <a:pPr algn="ctr" indent="0" marL="0">
+              <a:buNone/>
+            </a:pPr>
+            <a:r>
+              <a:rPr lang="en-US" sz="1600" b="1" dirty="0">
+                <a:solidFill>
+                  <a:srgbClr val="FFFFFF"/>
+                </a:solidFill>
+              </a:rPr>
+              <a:t>2億</a:t>
+            </a:r>
+            <a:endParaRPr lang="en-US" sz="1600" dirty="0"/>
+          </a:p>
+        </p:txBody>
+      </p:sp>
+      <p:sp>
+        <p:nvSpPr>
+          <p:cNvPr id="13" name="Text 11"/>
+          <p:cNvSpPr/>
+          <p:nvPr/>
+        </p:nvSpPr>
+        <p:spPr>
+          <a:xfrm>
+            <a:off x="8294914" y="3310128"/>
+            <a:ext cx="1476103" cy="749808"/>
+          </a:xfrm>
+          <a:prstGeom prst="roundRect">
+            <a:avLst>
+              <a:gd name="adj" fmla="val 4878"/>
+            </a:avLst>
+          </a:prstGeom>
+          <a:solidFill>
+            <a:srgbClr val="2C5F2D"/>
+          </a:solidFill>
+          <a:ln/>
+        </p:spPr>
+        <p:txBody>
+          <a:bodyPr wrap="square" rtlCol="0" anchor="ctr"/>
+          <a:lstStyle/>
+          <a:p>
+            <a:pPr algn="ctr" indent="0" marL="0">
+              <a:buNone/>
+            </a:pPr>
+            <a:r>
+              <a:rPr lang="en-US" sz="1600" b="1" dirty="0">
+                <a:solidFill>
+                  <a:srgbClr val="FFFFFF"/>
+                </a:solidFill>
+              </a:rPr>
+              <a:t>1億</a:t>
+            </a:r>
+            <a:endParaRPr lang="en-US" sz="1600" dirty="0"/>
+          </a:p>
+        </p:txBody>
+      </p:sp>
+      <p:sp>
+        <p:nvSpPr>
+          <p:cNvPr id="14" name="Text 12"/>
+          <p:cNvSpPr/>
+          <p:nvPr/>
+        </p:nvSpPr>
+        <p:spPr>
+          <a:xfrm>
+            <a:off x="9771017" y="3310128"/>
+            <a:ext cx="1476103" cy="749808"/>
+          </a:xfrm>
+          <a:prstGeom prst="roundRect">
+            <a:avLst>
+              <a:gd name="adj" fmla="val 4878"/>
+            </a:avLst>
+          </a:prstGeom>
+          <a:solidFill>
+            <a:srgbClr val="8C3B4A"/>
+          </a:solidFill>
+          <a:ln/>
+        </p:spPr>
+        <p:txBody>
+          <a:bodyPr wrap="square" rtlCol="0" anchor="ctr"/>
+          <a:lstStyle/>
+          <a:p>
+            <a:pPr algn="ctr" indent="0" marL="0">
+              <a:buNone/>
+            </a:pPr>
+            <a:r>
+              <a:rPr lang="en-US" sz="1600" b="1" dirty="0">
+                <a:solidFill>
+                  <a:srgbClr val="FFFFFF"/>
+                </a:solidFill>
+              </a:rPr>
+              <a:t>1億</a:t>
+            </a:r>
+            <a:endParaRPr lang="en-US" sz="1600" dirty="0"/>
+          </a:p>
+        </p:txBody>
+      </p:sp>
+      <p:sp>
+        <p:nvSpPr>
+          <p:cNvPr id="15" name="Shape 13"/>
+          <p:cNvSpPr/>
+          <p:nvPr/>
+        </p:nvSpPr>
+        <p:spPr>
+          <a:xfrm>
+            <a:off x="914400" y="4315968"/>
+            <a:ext cx="2468880" cy="1481328"/>
+          </a:xfrm>
+          <a:prstGeom prst="roundRect">
+            <a:avLst>
+              <a:gd name="adj" fmla="val 6173"/>
+            </a:avLst>
+          </a:prstGeom>
+          <a:solidFill>
+            <a:srgbClr val="FFFFFF"/>
+          </a:solidFill>
+          <a:ln w="19050">
+            <a:solidFill>
+              <a:srgbClr val="1C7293"/>
+            </a:solidFill>
+            <a:prstDash val="solid"/>
+          </a:ln>
+        </p:spPr>
+      </p:sp>
+      <p:sp>
+        <p:nvSpPr>
+          <p:cNvPr id="16" name="Text 14"/>
+          <p:cNvSpPr/>
+          <p:nvPr/>
+        </p:nvSpPr>
+        <p:spPr>
+          <a:xfrm>
+            <a:off x="1078992" y="4407408"/>
+            <a:ext cx="2139696" cy="566928"/>
+          </a:xfrm>
+          <a:prstGeom prst="rect">
+            <a:avLst/>
+          </a:prstGeom>
+          <a:noFill/>
+          <a:ln/>
+        </p:spPr>
+        <p:txBody>
+          <a:bodyPr wrap="square" rtlCol="0" anchor="ctr"/>
+          <a:lstStyle/>
+          <a:p>
+            <a:pPr algn="l" indent="0" marL="0">
+              <a:lnSpc>
+                <a:spcPct val="98000"/>
+              </a:lnSpc>
+              <a:buNone/>
+            </a:pPr>
+            <a:r>
+              <a:rPr lang="en-US" sz="1250" b="1" dirty="0">
+                <a:solidFill>
+                  <a:srgbClr val="1C7293"/>
+                </a:solidFill>
+              </a:rPr>
+              <a:t>リフォーム本業</a:t>
+            </a:r>
+            <a:endParaRPr lang="en-US" sz="1250" dirty="0"/>
+          </a:p>
+          <a:p>
+            <a:pPr algn="l" indent="0" marL="0">
+              <a:lnSpc>
+                <a:spcPct val="98000"/>
+              </a:lnSpc>
+              <a:buNone/>
+            </a:pPr>
+            <a:r>
+              <a:rPr lang="en-US" sz="850" dirty="0">
+                <a:solidFill>
+                  <a:srgbClr val="8A8A8A"/>
+                </a:solidFill>
+              </a:rPr>
+              <a:t>積水ハウス不動産 等</a:t>
+            </a:r>
+            <a:endParaRPr lang="en-US" sz="1250" dirty="0"/>
+          </a:p>
+        </p:txBody>
+      </p:sp>
+      <p:sp>
+        <p:nvSpPr>
+          <p:cNvPr id="17" name="Text 15"/>
+          <p:cNvSpPr/>
+          <p:nvPr/>
+        </p:nvSpPr>
+        <p:spPr>
+          <a:xfrm>
+            <a:off x="1078992" y="4992624"/>
+            <a:ext cx="2139696" cy="457200"/>
+          </a:xfrm>
+          <a:prstGeom prst="rect">
+            <a:avLst/>
+          </a:prstGeom>
+          <a:noFill/>
+          <a:ln/>
+        </p:spPr>
+        <p:txBody>
+          <a:bodyPr wrap="square" rtlCol="0" anchor="ctr"/>
+          <a:lstStyle/>
+          <a:p>
+            <a:pPr algn="l" indent="0" marL="0">
+              <a:buNone/>
+            </a:pPr>
+            <a:r>
+              <a:rPr lang="en-US" sz="2000" b="1" dirty="0">
+                <a:solidFill>
+                  <a:srgbClr val="1C7293"/>
+                </a:solidFill>
+              </a:rPr>
+              <a:t>3億円</a:t>
+            </a:r>
+            <a:endParaRPr lang="en-US" sz="2000" dirty="0"/>
+          </a:p>
+        </p:txBody>
+      </p:sp>
+      <p:sp>
+        <p:nvSpPr>
+          <p:cNvPr id="18" name="Text 16"/>
+          <p:cNvSpPr/>
+          <p:nvPr/>
+        </p:nvSpPr>
+        <p:spPr>
+          <a:xfrm>
+            <a:off x="1078992" y="5449824"/>
+            <a:ext cx="2139696" cy="292608"/>
+          </a:xfrm>
+          <a:prstGeom prst="rect">
+            <a:avLst/>
+          </a:prstGeom>
+          <a:noFill/>
+          <a:ln/>
+        </p:spPr>
+        <p:txBody>
+          <a:bodyPr wrap="square" rtlCol="0" anchor="ctr"/>
+          <a:lstStyle/>
+          <a:p>
+            <a:pPr algn="l" indent="0" marL="0">
+              <a:buNone/>
+            </a:pPr>
+            <a:r>
+              <a:rPr lang="en-US" sz="950" dirty="0">
+                <a:solidFill>
+                  <a:srgbClr val="36454F"/>
+                </a:solidFill>
+              </a:rPr>
+              <a:t>会社の土台（実績あり）</a:t>
+            </a:r>
+            <a:endParaRPr lang="en-US" sz="950" dirty="0"/>
+          </a:p>
+        </p:txBody>
+      </p:sp>
+      <p:sp>
+        <p:nvSpPr>
+          <p:cNvPr id="19" name="Shape 17"/>
+          <p:cNvSpPr/>
+          <p:nvPr/>
+        </p:nvSpPr>
+        <p:spPr>
+          <a:xfrm>
+            <a:off x="3538728" y="4315968"/>
+            <a:ext cx="2468880" cy="1481328"/>
+          </a:xfrm>
+          <a:prstGeom prst="roundRect">
+            <a:avLst>
+              <a:gd name="adj" fmla="val 6173"/>
+            </a:avLst>
+          </a:prstGeom>
+          <a:solidFill>
+            <a:srgbClr val="FFFFFF"/>
+          </a:solidFill>
+          <a:ln w="19050">
+            <a:solidFill>
+              <a:srgbClr val="C9742E"/>
+            </a:solidFill>
+            <a:prstDash val="solid"/>
+          </a:ln>
+        </p:spPr>
+      </p:sp>
+      <p:sp>
+        <p:nvSpPr>
+          <p:cNvPr id="20" name="Text 18"/>
+          <p:cNvSpPr/>
+          <p:nvPr/>
+        </p:nvSpPr>
+        <p:spPr>
+          <a:xfrm>
+            <a:off x="3703320" y="4407408"/>
+            <a:ext cx="2139696" cy="566928"/>
+          </a:xfrm>
+          <a:prstGeom prst="rect">
+            <a:avLst/>
+          </a:prstGeom>
+          <a:noFill/>
+          <a:ln/>
+        </p:spPr>
+        <p:txBody>
+          <a:bodyPr wrap="square" rtlCol="0" anchor="ctr"/>
+          <a:lstStyle/>
+          <a:p>
+            <a:pPr algn="l" indent="0" marL="0">
+              <a:lnSpc>
+                <a:spcPct val="98000"/>
+              </a:lnSpc>
+              <a:buNone/>
+            </a:pPr>
+            <a:r>
+              <a:rPr lang="en-US" sz="1250" b="1" dirty="0">
+                <a:solidFill>
+                  <a:srgbClr val="C9742E"/>
+                </a:solidFill>
+              </a:rPr>
+              <a:t>ランドリー事業</a:t>
+            </a:r>
+            <a:endParaRPr lang="en-US" sz="1250" dirty="0"/>
+          </a:p>
+          <a:p>
+            <a:pPr algn="l" indent="0" marL="0">
+              <a:lnSpc>
+                <a:spcPct val="98000"/>
+              </a:lnSpc>
+              <a:buNone/>
+            </a:pPr>
+            <a:r>
+              <a:rPr lang="en-US" sz="850" dirty="0">
+                <a:solidFill>
+                  <a:srgbClr val="8A8A8A"/>
+                </a:solidFill>
+              </a:rPr>
+              <a:t>moco・穀物乾燥機</a:t>
+            </a:r>
+            <a:endParaRPr lang="en-US" sz="1250" dirty="0"/>
+          </a:p>
+        </p:txBody>
+      </p:sp>
+      <p:sp>
+        <p:nvSpPr>
+          <p:cNvPr id="21" name="Text 19"/>
+          <p:cNvSpPr/>
+          <p:nvPr/>
+        </p:nvSpPr>
+        <p:spPr>
+          <a:xfrm>
+            <a:off x="3703320" y="4992624"/>
+            <a:ext cx="2139696" cy="457200"/>
+          </a:xfrm>
+          <a:prstGeom prst="rect">
+            <a:avLst/>
+          </a:prstGeom>
+          <a:noFill/>
+          <a:ln/>
+        </p:spPr>
+        <p:txBody>
+          <a:bodyPr wrap="square" rtlCol="0" anchor="ctr"/>
+          <a:lstStyle/>
+          <a:p>
+            <a:pPr algn="l" indent="0" marL="0">
+              <a:buNone/>
+            </a:pPr>
+            <a:r>
+              <a:rPr lang="en-US" sz="2000" b="1" dirty="0">
+                <a:solidFill>
+                  <a:srgbClr val="C9742E"/>
+                </a:solidFill>
+              </a:rPr>
+              <a:t>2億円</a:t>
+            </a:r>
+            <a:endParaRPr lang="en-US" sz="2000" dirty="0"/>
+          </a:p>
+        </p:txBody>
+      </p:sp>
+      <p:sp>
+        <p:nvSpPr>
+          <p:cNvPr id="22" name="Text 20"/>
+          <p:cNvSpPr/>
+          <p:nvPr/>
+        </p:nvSpPr>
+        <p:spPr>
+          <a:xfrm>
+            <a:off x="3703320" y="5449824"/>
+            <a:ext cx="2139696" cy="292608"/>
+          </a:xfrm>
+          <a:prstGeom prst="rect">
+            <a:avLst/>
+          </a:prstGeom>
+          <a:noFill/>
+          <a:ln/>
+        </p:spPr>
+        <p:txBody>
+          <a:bodyPr wrap="square" rtlCol="0" anchor="ctr"/>
+          <a:lstStyle/>
+          <a:p>
+            <a:pPr algn="l" indent="0" marL="0">
+              <a:buNone/>
+            </a:pPr>
+            <a:r>
+              <a:rPr lang="en-US" sz="950" dirty="0">
+                <a:solidFill>
+                  <a:srgbClr val="36454F"/>
+                </a:solidFill>
+              </a:rPr>
+              <a:t>第2の柱へ</a:t>
+            </a:r>
+            <a:endParaRPr lang="en-US" sz="950" dirty="0"/>
+          </a:p>
+        </p:txBody>
+      </p:sp>
+      <p:sp>
+        <p:nvSpPr>
+          <p:cNvPr id="23" name="Shape 21"/>
+          <p:cNvSpPr/>
+          <p:nvPr/>
+        </p:nvSpPr>
+        <p:spPr>
+          <a:xfrm>
+            <a:off x="6163056" y="4315968"/>
+            <a:ext cx="2468880" cy="1481328"/>
+          </a:xfrm>
+          <a:prstGeom prst="roundRect">
+            <a:avLst>
+              <a:gd name="adj" fmla="val 6173"/>
+            </a:avLst>
+          </a:prstGeom>
+          <a:solidFill>
+            <a:srgbClr val="FFFFFF"/>
+          </a:solidFill>
+          <a:ln w="19050">
+            <a:solidFill>
+              <a:srgbClr val="2C5F2D"/>
+            </a:solidFill>
+            <a:prstDash val="solid"/>
+          </a:ln>
+        </p:spPr>
+      </p:sp>
+      <p:sp>
+        <p:nvSpPr>
+          <p:cNvPr id="24" name="Text 22"/>
+          <p:cNvSpPr/>
+          <p:nvPr/>
+        </p:nvSpPr>
+        <p:spPr>
+          <a:xfrm>
+            <a:off x="6327648" y="4407408"/>
+            <a:ext cx="2139696" cy="566928"/>
+          </a:xfrm>
+          <a:prstGeom prst="rect">
+            <a:avLst/>
+          </a:prstGeom>
+          <a:noFill/>
+          <a:ln/>
+        </p:spPr>
+        <p:txBody>
+          <a:bodyPr wrap="square" rtlCol="0" anchor="ctr"/>
+          <a:lstStyle/>
+          <a:p>
+            <a:pPr algn="l" indent="0" marL="0">
+              <a:lnSpc>
+                <a:spcPct val="98000"/>
+              </a:lnSpc>
+              <a:buNone/>
+            </a:pPr>
+            <a:r>
+              <a:rPr lang="en-US" sz="1250" b="1" dirty="0">
+                <a:solidFill>
+                  <a:srgbClr val="2C5F2D"/>
+                </a:solidFill>
+              </a:rPr>
+              <a:t>代表直轄リフォーム</a:t>
+            </a:r>
+            <a:endParaRPr lang="en-US" sz="1250" dirty="0"/>
+          </a:p>
+          <a:p>
+            <a:pPr algn="l" indent="0" marL="0">
+              <a:lnSpc>
+                <a:spcPct val="98000"/>
+              </a:lnSpc>
+              <a:buNone/>
+            </a:pPr>
+            <a:r>
+              <a:rPr lang="en-US" sz="850" dirty="0">
+                <a:solidFill>
+                  <a:srgbClr val="8A8A8A"/>
+                </a:solidFill>
+              </a:rPr>
+              <a:t>LIXIL等・広顕の現場</a:t>
+            </a:r>
+            <a:endParaRPr lang="en-US" sz="1250" dirty="0"/>
+          </a:p>
+        </p:txBody>
+      </p:sp>
+      <p:sp>
+        <p:nvSpPr>
+          <p:cNvPr id="25" name="Text 23"/>
+          <p:cNvSpPr/>
+          <p:nvPr/>
+        </p:nvSpPr>
+        <p:spPr>
+          <a:xfrm>
+            <a:off x="6327648" y="4992624"/>
+            <a:ext cx="2139696" cy="457200"/>
+          </a:xfrm>
+          <a:prstGeom prst="rect">
+            <a:avLst/>
+          </a:prstGeom>
+          <a:noFill/>
+          <a:ln/>
+        </p:spPr>
+        <p:txBody>
+          <a:bodyPr wrap="square" rtlCol="0" anchor="ctr"/>
+          <a:lstStyle/>
+          <a:p>
+            <a:pPr algn="l" indent="0" marL="0">
+              <a:buNone/>
+            </a:pPr>
+            <a:r>
+              <a:rPr lang="en-US" sz="2000" b="1" dirty="0">
+                <a:solidFill>
+                  <a:srgbClr val="2C5F2D"/>
+                </a:solidFill>
+              </a:rPr>
+              <a:t>1億円</a:t>
+            </a:r>
+            <a:endParaRPr lang="en-US" sz="2000" dirty="0"/>
+          </a:p>
+        </p:txBody>
+      </p:sp>
+      <p:sp>
+        <p:nvSpPr>
+          <p:cNvPr id="26" name="Text 24"/>
+          <p:cNvSpPr/>
+          <p:nvPr/>
+        </p:nvSpPr>
+        <p:spPr>
+          <a:xfrm>
+            <a:off x="6327648" y="5449824"/>
+            <a:ext cx="2139696" cy="292608"/>
+          </a:xfrm>
+          <a:prstGeom prst="rect">
+            <a:avLst/>
+          </a:prstGeom>
+          <a:noFill/>
+          <a:ln/>
+        </p:spPr>
+        <p:txBody>
+          <a:bodyPr wrap="square" rtlCol="0" anchor="ctr"/>
+          <a:lstStyle/>
+          <a:p>
+            <a:pPr algn="l" indent="0" marL="0">
+              <a:buNone/>
+            </a:pPr>
+            <a:r>
+              <a:rPr lang="en-US" sz="950" dirty="0">
+                <a:solidFill>
+                  <a:srgbClr val="36454F"/>
+                </a:solidFill>
+              </a:rPr>
+              <a:t>社長の現場力</a:t>
+            </a:r>
+            <a:endParaRPr lang="en-US" sz="950" dirty="0"/>
+          </a:p>
+        </p:txBody>
+      </p:sp>
+      <p:sp>
+        <p:nvSpPr>
+          <p:cNvPr id="27" name="Shape 25"/>
+          <p:cNvSpPr/>
+          <p:nvPr/>
+        </p:nvSpPr>
+        <p:spPr>
+          <a:xfrm>
+            <a:off x="8787384" y="4315968"/>
+            <a:ext cx="2468880" cy="1481328"/>
+          </a:xfrm>
+          <a:prstGeom prst="roundRect">
+            <a:avLst>
+              <a:gd name="adj" fmla="val 6173"/>
+            </a:avLst>
+          </a:prstGeom>
+          <a:solidFill>
+            <a:srgbClr val="FFFFFF"/>
+          </a:solidFill>
+          <a:ln w="19050">
+            <a:solidFill>
+              <a:srgbClr val="8C3B4A"/>
+            </a:solidFill>
+            <a:prstDash val="solid"/>
+          </a:ln>
+        </p:spPr>
+      </p:sp>
+      <p:sp>
+        <p:nvSpPr>
+          <p:cNvPr id="28" name="Text 26"/>
+          <p:cNvSpPr/>
+          <p:nvPr/>
+        </p:nvSpPr>
+        <p:spPr>
+          <a:xfrm>
+            <a:off x="8951976" y="4407408"/>
+            <a:ext cx="2139696" cy="566928"/>
+          </a:xfrm>
+          <a:prstGeom prst="rect">
+            <a:avLst/>
+          </a:prstGeom>
+          <a:noFill/>
+          <a:ln/>
+        </p:spPr>
+        <p:txBody>
+          <a:bodyPr wrap="square" rtlCol="0" anchor="ctr"/>
+          <a:lstStyle/>
+          <a:p>
+            <a:pPr algn="l" indent="0" marL="0">
+              <a:lnSpc>
+                <a:spcPct val="98000"/>
+              </a:lnSpc>
+              <a:buNone/>
+            </a:pPr>
+            <a:r>
+              <a:rPr lang="en-US" sz="1250" b="1" dirty="0">
+                <a:solidFill>
+                  <a:srgbClr val="8C3B4A"/>
+                </a:solidFill>
+              </a:rPr>
+              <a:t>新規3事業</a:t>
+            </a:r>
+            <a:endParaRPr lang="en-US" sz="1250" dirty="0"/>
+          </a:p>
+          <a:p>
+            <a:pPr algn="l" indent="0" marL="0">
+              <a:lnSpc>
+                <a:spcPct val="98000"/>
+              </a:lnSpc>
+              <a:buNone/>
+            </a:pPr>
+            <a:r>
+              <a:rPr lang="en-US" sz="850" dirty="0">
+                <a:solidFill>
+                  <a:srgbClr val="8A8A8A"/>
+                </a:solidFill>
+              </a:rPr>
+              <a:t>サウナ・ウェルネス・カフェ</a:t>
+            </a:r>
+            <a:endParaRPr lang="en-US" sz="1250" dirty="0"/>
+          </a:p>
+        </p:txBody>
+      </p:sp>
+      <p:sp>
+        <p:nvSpPr>
+          <p:cNvPr id="29" name="Text 27"/>
+          <p:cNvSpPr/>
+          <p:nvPr/>
+        </p:nvSpPr>
+        <p:spPr>
+          <a:xfrm>
+            <a:off x="8951976" y="4992624"/>
+            <a:ext cx="2139696" cy="457200"/>
+          </a:xfrm>
+          <a:prstGeom prst="rect">
+            <a:avLst/>
+          </a:prstGeom>
+          <a:noFill/>
+          <a:ln/>
+        </p:spPr>
+        <p:txBody>
+          <a:bodyPr wrap="square" rtlCol="0" anchor="ctr"/>
+          <a:lstStyle/>
+          <a:p>
+            <a:pPr algn="l" indent="0" marL="0">
+              <a:buNone/>
+            </a:pPr>
+            <a:r>
+              <a:rPr lang="en-US" sz="2000" b="1" dirty="0">
+                <a:solidFill>
+                  <a:srgbClr val="8C3B4A"/>
+                </a:solidFill>
+              </a:rPr>
+              <a:t>1億円</a:t>
+            </a:r>
+            <a:endParaRPr lang="en-US" sz="2000" dirty="0"/>
+          </a:p>
+        </p:txBody>
+      </p:sp>
+      <p:sp>
+        <p:nvSpPr>
+          <p:cNvPr id="30" name="Text 28"/>
+          <p:cNvSpPr/>
+          <p:nvPr/>
+        </p:nvSpPr>
+        <p:spPr>
+          <a:xfrm>
+            <a:off x="8951976" y="5449824"/>
+            <a:ext cx="2139696" cy="292608"/>
+          </a:xfrm>
+          <a:prstGeom prst="rect">
+            <a:avLst/>
+          </a:prstGeom>
+          <a:noFill/>
+          <a:ln/>
+        </p:spPr>
+        <p:txBody>
+          <a:bodyPr wrap="square" rtlCol="0" anchor="ctr"/>
+          <a:lstStyle/>
+          <a:p>
+            <a:pPr algn="l" indent="0" marL="0">
+              <a:buNone/>
+            </a:pPr>
+            <a:r>
+              <a:rPr lang="en-US" sz="950" dirty="0">
+                <a:solidFill>
+                  <a:srgbClr val="36454F"/>
+                </a:solidFill>
+              </a:rPr>
+              <a:t>これからの種</a:t>
+            </a:r>
+            <a:endParaRPr lang="en-US" sz="950" dirty="0"/>
+          </a:p>
+        </p:txBody>
+      </p:sp>
+      <p:sp>
+        <p:nvSpPr>
+          <p:cNvPr id="31" name="Text 29"/>
+          <p:cNvSpPr/>
+          <p:nvPr/>
+        </p:nvSpPr>
+        <p:spPr>
+          <a:xfrm>
+            <a:off x="914400" y="5961888"/>
+            <a:ext cx="10332720" cy="384048"/>
+          </a:xfrm>
+          <a:prstGeom prst="rect">
+            <a:avLst/>
+          </a:prstGeom>
+          <a:noFill/>
+          <a:ln/>
+        </p:spPr>
+        <p:txBody>
+          <a:bodyPr wrap="square" rtlCol="0" anchor="ctr"/>
+          <a:lstStyle/>
+          <a:p>
+            <a:pPr algn="ctr" indent="0" marL="0">
+              <a:buNone/>
+            </a:pPr>
+            <a:r>
+              <a:rPr lang="en-US" sz="1200" i="1" dirty="0">
+                <a:solidFill>
+                  <a:srgbClr val="36454F"/>
+                </a:solidFill>
+              </a:rPr>
+              <a:t>本業（約4.3億の工事実績）を土台に、ランドリーと新規事業を伸ばして＋2.35億。全体で7億へ。</a:t>
+            </a:r>
+            <a:endParaRPr lang="en-US" sz="1200" dirty="0"/>
+          </a:p>
+        </p:txBody>
+      </p:sp>
+    </p:spTree>
+  </p:cSld>
+  <p:clrMapOvr>
+    <a:masterClrMapping/>
+  </p:clrMapOvr>
+</p:sld>
+</file>
+
+<file path=ppt/slides/slide11.xml><?xml version="1.0" encoding="utf-8"?>
+<p:sld xmlns:a="http://schemas.openxmlformats.org/drawingml/2006/main" xmlns:r="http://schemas.openxmlformats.org/officeDocument/2006/relationships" xmlns:p="http://schemas.openxmlformats.org/presentationml/2006/main">
+  <p:cSld name="Slide 11">
+    <p:bg>
+      <p:bgPr>
+        <a:solidFill>
+          <a:srgbClr val="2C5F2D"/>
+        </a:solidFill>
+      </p:bgPr>
+    </p:bg>
+    <p:spTree>
+      <p:nvGrpSpPr>
+        <p:cNvPr id="1" name=""/>
+        <p:cNvGrpSpPr/>
+        <p:nvPr/>
+      </p:nvGrpSpPr>
+      <p:grpSpPr>
+        <a:xfrm>
+          <a:off x="0" y="0"/>
+          <a:ext cx="0" cy="0"/>
+          <a:chOff x="0" y="0"/>
+          <a:chExt cx="0" cy="0"/>
+        </a:xfrm>
+      </p:grpSpPr>
+      <p:sp>
+        <p:nvSpPr>
+          <p:cNvPr id="2" name="Shape 0"/>
+          <p:cNvSpPr/>
+          <p:nvPr/>
+        </p:nvSpPr>
+        <p:spPr>
+          <a:xfrm>
+            <a:off x="0" y="0"/>
+            <a:ext cx="12191695" cy="6858000"/>
+          </a:xfrm>
+          <a:prstGeom prst="roundRect">
+            <a:avLst/>
+          </a:prstGeom>
+          <a:solidFill>
+            <a:srgbClr val="2C5F2D"/>
+          </a:solidFill>
+          <a:ln/>
+        </p:spPr>
+      </p:sp>
+      <p:sp>
+        <p:nvSpPr>
+          <p:cNvPr id="3" name="Shape 1"/>
+          <p:cNvSpPr/>
+          <p:nvPr/>
+        </p:nvSpPr>
+        <p:spPr>
+          <a:xfrm>
+            <a:off x="0" y="1828800"/>
+            <a:ext cx="12191695" cy="91440"/>
+          </a:xfrm>
+          <a:prstGeom prst="roundRect">
+            <a:avLst/>
+          </a:prstGeom>
+          <a:solidFill>
+            <a:srgbClr val="C9742E"/>
+          </a:solidFill>
+          <a:ln/>
+        </p:spPr>
+      </p:sp>
+      <p:sp>
+        <p:nvSpPr>
+          <p:cNvPr id="4" name="Text 2"/>
+          <p:cNvSpPr/>
+          <p:nvPr/>
+        </p:nvSpPr>
+        <p:spPr>
+          <a:xfrm>
+            <a:off x="914400" y="777240"/>
+            <a:ext cx="10332720" cy="457200"/>
+          </a:xfrm>
+          <a:prstGeom prst="rect">
+            <a:avLst/>
+          </a:prstGeom>
+          <a:noFill/>
+          <a:ln/>
+        </p:spPr>
+        <p:txBody>
+          <a:bodyPr wrap="square" rtlCol="0" anchor="ctr"/>
+          <a:lstStyle/>
+          <a:p>
+            <a:pPr algn="l" indent="0" marL="0">
+              <a:buNone/>
+            </a:pPr>
+            <a:r>
+              <a:rPr lang="en-US" sz="1500" b="1" dirty="0">
+                <a:solidFill>
+                  <a:srgbClr val="CFE3CF"/>
+                </a:solidFill>
+              </a:rPr>
+              <a:t>私たちのビジョン</a:t>
+            </a:r>
+            <a:endParaRPr lang="en-US" sz="1500" dirty="0"/>
+          </a:p>
+        </p:txBody>
+      </p:sp>
+      <p:sp>
+        <p:nvSpPr>
+          <p:cNvPr id="5" name="Text 3"/>
+          <p:cNvSpPr/>
+          <p:nvPr/>
+        </p:nvSpPr>
+        <p:spPr>
+          <a:xfrm>
+            <a:off x="868680" y="2286000"/>
+            <a:ext cx="10515600" cy="1828800"/>
+          </a:xfrm>
+          <a:prstGeom prst="rect">
+            <a:avLst/>
+          </a:prstGeom>
+          <a:noFill/>
+          <a:ln/>
+        </p:spPr>
+        <p:txBody>
+          <a:bodyPr wrap="square" rtlCol="0" anchor="ctr"/>
+          <a:lstStyle/>
+          <a:p>
+            <a:pPr algn="l" indent="0" marL="0">
+              <a:lnSpc>
+                <a:spcPct val="112000"/>
+              </a:lnSpc>
+              <a:buNone/>
+            </a:pPr>
+            <a:r>
+              <a:rPr lang="en-US" sz="3000" b="1" dirty="0">
+                <a:solidFill>
+                  <a:srgbClr val="CFE3CF"/>
+                </a:solidFill>
+              </a:rPr>
+              <a:t>「住まいの会社」から、</a:t>
+            </a:r>
+            <a:endParaRPr lang="en-US" sz="3000" dirty="0"/>
+          </a:p>
+          <a:p>
+            <a:pPr algn="l" indent="0" marL="0">
+              <a:lnSpc>
+                <a:spcPct val="112000"/>
+              </a:lnSpc>
+              <a:buNone/>
+            </a:pPr>
+            <a:r>
+              <a:rPr lang="en-US" sz="4000" b="1" dirty="0">
+                <a:solidFill>
+                  <a:srgbClr val="FFFFFF"/>
+                </a:solidFill>
+              </a:rPr>
+              <a:t>大和町発・“暮らしと健康”の</a:t>
+            </a:r>
+            <a:endParaRPr lang="en-US" sz="3000" dirty="0"/>
+          </a:p>
+          <a:p>
+            <a:pPr algn="l" indent="0" marL="0">
+              <a:lnSpc>
+                <a:spcPct val="112000"/>
+              </a:lnSpc>
+              <a:buNone/>
+            </a:pPr>
+            <a:r>
+              <a:rPr lang="en-US" sz="4000" b="1" dirty="0">
+                <a:solidFill>
+                  <a:srgbClr val="FFFFFF"/>
+                </a:solidFill>
+              </a:rPr>
+              <a:t>地域プラットフォームへ。</a:t>
+            </a:r>
+            <a:endParaRPr lang="en-US" sz="3000" dirty="0"/>
+          </a:p>
+        </p:txBody>
+      </p:sp>
+      <p:sp>
+        <p:nvSpPr>
+          <p:cNvPr id="6" name="Text 4"/>
+          <p:cNvSpPr/>
+          <p:nvPr/>
+        </p:nvSpPr>
+        <p:spPr>
+          <a:xfrm>
+            <a:off x="914400" y="4937760"/>
+            <a:ext cx="10332720" cy="1005840"/>
+          </a:xfrm>
+          <a:prstGeom prst="rect">
+            <a:avLst/>
+          </a:prstGeom>
+          <a:noFill/>
+          <a:ln/>
+        </p:spPr>
+        <p:txBody>
+          <a:bodyPr wrap="square" rtlCol="0" anchor="ctr"/>
+          <a:lstStyle/>
+          <a:p>
+            <a:pPr algn="l" indent="0" marL="0">
+              <a:lnSpc>
+                <a:spcPct val="110000"/>
+              </a:lnSpc>
+              <a:buNone/>
+            </a:pPr>
+            <a:r>
+              <a:rPr lang="en-US" sz="2000" b="1" dirty="0">
+                <a:solidFill>
+                  <a:srgbClr val="F0F6F0"/>
+                </a:solidFill>
+              </a:rPr>
+              <a:t>直す力で、人を、地域を、社会を、整えていく。</a:t>
+            </a:r>
+            <a:endParaRPr lang="en-US" sz="2000" dirty="0"/>
+          </a:p>
+          <a:p>
+            <a:pPr algn="l" indent="0" marL="0">
+              <a:lnSpc>
+                <a:spcPct val="110000"/>
+              </a:lnSpc>
+              <a:buNone/>
+            </a:pPr>
+            <a:r>
+              <a:rPr lang="en-US" sz="2000" b="1" dirty="0">
+                <a:solidFill>
+                  <a:srgbClr val="F0F6F0"/>
+                </a:solidFill>
+              </a:rPr>
+              <a:t>宮城の“ととのう暮らし”をつくる会社に。</a:t>
+            </a:r>
+            <a:endParaRPr lang="en-US" sz="2000" dirty="0"/>
+          </a:p>
+        </p:txBody>
+      </p:sp>
+    </p:spTree>
+  </p:cSld>
+  <p:clrMapOvr>
+    <a:masterClrMapping/>
+  </p:clrMapOvr>
+</p:sld>
+</file>
+
+<file path=ppt/slides/slide12.xml><?xml version="1.0" encoding="utf-8"?>
+<p:sld xmlns:a="http://schemas.openxmlformats.org/drawingml/2006/main" xmlns:r="http://schemas.openxmlformats.org/officeDocument/2006/relationships" xmlns:p="http://schemas.openxmlformats.org/presentationml/2006/main">
+  <p:cSld name="Slide 12">
+    <p:bg>
+      <p:bgPr>
+        <a:solidFill>
+          <a:srgbClr val="F5F5F2"/>
+        </a:solidFill>
+      </p:bgPr>
+    </p:bg>
+    <p:spTree>
+      <p:nvGrpSpPr>
+        <p:cNvPr id="1" name=""/>
+        <p:cNvGrpSpPr/>
+        <p:nvPr/>
+      </p:nvGrpSpPr>
+      <p:grpSpPr>
+        <a:xfrm>
+          <a:off x="0" y="0"/>
+          <a:ext cx="0" cy="0"/>
+          <a:chOff x="0" y="0"/>
+          <a:chExt cx="0" cy="0"/>
+        </a:xfrm>
+      </p:grpSpPr>
+      <p:sp>
+        <p:nvSpPr>
+          <p:cNvPr id="2" name="Shape 0"/>
+          <p:cNvSpPr/>
+          <p:nvPr/>
+        </p:nvSpPr>
+        <p:spPr>
+          <a:xfrm>
+            <a:off x="502920" y="566928"/>
+            <a:ext cx="128016" cy="713232"/>
+          </a:xfrm>
+          <a:prstGeom prst="roundRect">
+            <a:avLst>
+              <a:gd name="adj" fmla="val 28571"/>
+            </a:avLst>
+          </a:prstGeom>
+          <a:solidFill>
+            <a:srgbClr val="2C5F2D"/>
+          </a:solidFill>
+          <a:ln/>
+        </p:spPr>
+      </p:sp>
+      <p:sp>
+        <p:nvSpPr>
+          <p:cNvPr id="3" name="Text 1"/>
+          <p:cNvSpPr/>
+          <p:nvPr/>
+        </p:nvSpPr>
+        <p:spPr>
+          <a:xfrm>
+            <a:off x="777240" y="530352"/>
+            <a:ext cx="10515600" cy="310896"/>
+          </a:xfrm>
+          <a:prstGeom prst="rect">
+            <a:avLst/>
+          </a:prstGeom>
+          <a:noFill/>
+          <a:ln/>
+        </p:spPr>
+        <p:txBody>
+          <a:bodyPr wrap="square" rtlCol="0" anchor="ctr"/>
+          <a:lstStyle/>
+          <a:p>
+            <a:pPr algn="l" indent="0" marL="0">
+              <a:buNone/>
+            </a:pPr>
+            <a:r>
+              <a:rPr lang="en-US" sz="1300" b="1" dirty="0">
+                <a:solidFill>
+                  <a:srgbClr val="C9742E"/>
+                </a:solidFill>
+              </a:rPr>
+              <a:t>みんなへ</a:t>
+            </a:r>
+            <a:endParaRPr lang="en-US" sz="1300" dirty="0"/>
+          </a:p>
+        </p:txBody>
+      </p:sp>
+      <p:sp>
+        <p:nvSpPr>
+          <p:cNvPr id="4" name="Text 2"/>
+          <p:cNvSpPr/>
+          <p:nvPr/>
+        </p:nvSpPr>
+        <p:spPr>
+          <a:xfrm>
+            <a:off x="749808" y="841248"/>
+            <a:ext cx="10789920" cy="640080"/>
+          </a:xfrm>
+          <a:prstGeom prst="rect">
+            <a:avLst/>
+          </a:prstGeom>
+          <a:noFill/>
+          <a:ln/>
+        </p:spPr>
+        <p:txBody>
+          <a:bodyPr wrap="square" rtlCol="0" anchor="ctr"/>
+          <a:lstStyle/>
+          <a:p>
+            <a:pPr algn="l" indent="0" marL="0">
+              <a:buNone/>
+            </a:pPr>
+            <a:r>
+              <a:rPr lang="en-US" sz="2700" b="1" dirty="0">
+                <a:solidFill>
+                  <a:srgbClr val="2C5F2D"/>
+                </a:solidFill>
+              </a:rPr>
+              <a:t>変わるのは「数」じゃない。社会との“つながり”が広がること。</a:t>
+            </a:r>
+            <a:endParaRPr lang="en-US" sz="2700" dirty="0"/>
+          </a:p>
+        </p:txBody>
+      </p:sp>
+      <p:sp>
+        <p:nvSpPr>
+          <p:cNvPr id="5" name="Shape 3"/>
+          <p:cNvSpPr/>
+          <p:nvPr/>
+        </p:nvSpPr>
+        <p:spPr>
+          <a:xfrm>
+            <a:off x="777240" y="1572768"/>
+            <a:ext cx="10607040" cy="0"/>
+          </a:xfrm>
+          <a:prstGeom prst="line">
+            <a:avLst/>
+          </a:prstGeom>
+          <a:noFill/>
+          <a:ln w="19050">
+            <a:solidFill>
+              <a:srgbClr val="D8D8D2"/>
+            </a:solidFill>
+            <a:prstDash val="solid"/>
+          </a:ln>
+        </p:spPr>
+      </p:sp>
+      <p:sp>
+        <p:nvSpPr>
+          <p:cNvPr id="6" name="Text 4"/>
+          <p:cNvSpPr/>
+          <p:nvPr/>
+        </p:nvSpPr>
+        <p:spPr>
+          <a:xfrm>
+            <a:off x="11155680" y="6382512"/>
+            <a:ext cx="822960" cy="310896"/>
+          </a:xfrm>
+          <a:prstGeom prst="rect">
+            <a:avLst/>
+          </a:prstGeom>
+          <a:noFill/>
+          <a:ln/>
+        </p:spPr>
+        <p:txBody>
+          <a:bodyPr wrap="square" rtlCol="0" anchor="ctr"/>
+          <a:lstStyle/>
+          <a:p>
+            <a:pPr algn="r" indent="0" marL="0">
+              <a:buNone/>
+            </a:pPr>
+            <a:r>
+              <a:rPr lang="en-US" sz="1100" dirty="0">
+                <a:solidFill>
+                  <a:srgbClr val="8A8A8A"/>
+                </a:solidFill>
+              </a:rPr>
+              <a:t>12</a:t>
             </a:r>
             <a:endParaRPr lang="en-US" sz="1100" dirty="0"/>
           </a:p>
@@ -6703,7 +8359,7 @@
     <p:bg>
       <p:bgPr>
         <a:solidFill>
-          <a:srgbClr val="2C5F2D"/>
+          <a:srgbClr val="F5F5F2"/>
         </a:solidFill>
       </p:bgPr>
     </p:bg>
@@ -6729,11 +8385,13 @@
         </p:nvSpPr>
         <p:spPr>
           <a:xfrm>
-            <a:off x="0" y="0"/>
-            <a:ext cx="12191695" cy="6858000"/>
+            <a:off x="502920" y="566928"/>
+            <a:ext cx="128016" cy="713232"/>
           </a:xfrm>
           <a:prstGeom prst="roundRect">
-            <a:avLst/>
+            <a:avLst>
+              <a:gd name="adj" fmla="val 28571"/>
+            </a:avLst>
           </a:prstGeom>
           <a:solidFill>
             <a:srgbClr val="2C5F2D"/>
@@ -6743,17 +8401,664 @@
       </p:sp>
       <p:sp>
         <p:nvSpPr>
-          <p:cNvPr id="3" name="Shape 1"/>
-          <p:cNvSpPr/>
-          <p:nvPr/>
-        </p:nvSpPr>
-        <p:spPr>
-          <a:xfrm>
-            <a:off x="0" y="1828800"/>
-            <a:ext cx="12191695" cy="91440"/>
+          <p:cNvPr id="3" name="Text 1"/>
+          <p:cNvSpPr/>
+          <p:nvPr/>
+        </p:nvSpPr>
+        <p:spPr>
+          <a:xfrm>
+            <a:off x="777240" y="530352"/>
+            <a:ext cx="10515600" cy="310896"/>
+          </a:xfrm>
+          <a:prstGeom prst="rect">
+            <a:avLst/>
+          </a:prstGeom>
+          <a:noFill/>
+          <a:ln/>
+        </p:spPr>
+        <p:txBody>
+          <a:bodyPr wrap="square" rtlCol="0" anchor="ctr"/>
+          <a:lstStyle/>
+          <a:p>
+            <a:pPr algn="l" indent="0" marL="0">
+              <a:buNone/>
+            </a:pPr>
+            <a:r>
+              <a:rPr lang="en-US" sz="1300" b="1" dirty="0">
+                <a:solidFill>
+                  <a:srgbClr val="C9742E"/>
+                </a:solidFill>
+              </a:rPr>
+              <a:t>ロードマップ</a:t>
+            </a:r>
+            <a:endParaRPr lang="en-US" sz="1300" dirty="0"/>
+          </a:p>
+        </p:txBody>
+      </p:sp>
+      <p:sp>
+        <p:nvSpPr>
+          <p:cNvPr id="4" name="Text 2"/>
+          <p:cNvSpPr/>
+          <p:nvPr/>
+        </p:nvSpPr>
+        <p:spPr>
+          <a:xfrm>
+            <a:off x="749808" y="841248"/>
+            <a:ext cx="10789920" cy="640080"/>
+          </a:xfrm>
+          <a:prstGeom prst="rect">
+            <a:avLst/>
+          </a:prstGeom>
+          <a:noFill/>
+          <a:ln/>
+        </p:spPr>
+        <p:txBody>
+          <a:bodyPr wrap="square" rtlCol="0" anchor="ctr"/>
+          <a:lstStyle/>
+          <a:p>
+            <a:pPr algn="l" indent="0" marL="0">
+              <a:buNone/>
+            </a:pPr>
+            <a:r>
+              <a:rPr lang="en-US" sz="2700" b="1" dirty="0">
+                <a:solidFill>
+                  <a:srgbClr val="2C5F2D"/>
+                </a:solidFill>
+              </a:rPr>
+              <a:t>5つの事業がそろうまで、そして、その先へ。</a:t>
+            </a:r>
+            <a:endParaRPr lang="en-US" sz="2700" dirty="0"/>
+          </a:p>
+        </p:txBody>
+      </p:sp>
+      <p:sp>
+        <p:nvSpPr>
+          <p:cNvPr id="5" name="Shape 3"/>
+          <p:cNvSpPr/>
+          <p:nvPr/>
+        </p:nvSpPr>
+        <p:spPr>
+          <a:xfrm>
+            <a:off x="777240" y="1572768"/>
+            <a:ext cx="10607040" cy="0"/>
+          </a:xfrm>
+          <a:prstGeom prst="line">
+            <a:avLst/>
+          </a:prstGeom>
+          <a:noFill/>
+          <a:ln w="19050">
+            <a:solidFill>
+              <a:srgbClr val="D8D8D2"/>
+            </a:solidFill>
+            <a:prstDash val="solid"/>
+          </a:ln>
+        </p:spPr>
+      </p:sp>
+      <p:sp>
+        <p:nvSpPr>
+          <p:cNvPr id="6" name="Text 4"/>
+          <p:cNvSpPr/>
+          <p:nvPr/>
+        </p:nvSpPr>
+        <p:spPr>
+          <a:xfrm>
+            <a:off x="11155680" y="6382512"/>
+            <a:ext cx="822960" cy="310896"/>
+          </a:xfrm>
+          <a:prstGeom prst="rect">
+            <a:avLst/>
+          </a:prstGeom>
+          <a:noFill/>
+          <a:ln/>
+        </p:spPr>
+        <p:txBody>
+          <a:bodyPr wrap="square" rtlCol="0" anchor="ctr"/>
+          <a:lstStyle/>
+          <a:p>
+            <a:pPr algn="r" indent="0" marL="0">
+              <a:buNone/>
+            </a:pPr>
+            <a:r>
+              <a:rPr lang="en-US" sz="1100" dirty="0">
+                <a:solidFill>
+                  <a:srgbClr val="8A8A8A"/>
+                </a:solidFill>
+              </a:rPr>
+              <a:t>9</a:t>
+            </a:r>
+            <a:endParaRPr lang="en-US" sz="1100" dirty="0"/>
+          </a:p>
+        </p:txBody>
+      </p:sp>
+      <p:sp>
+        <p:nvSpPr>
+          <p:cNvPr id="7" name="Shape 5"/>
+          <p:cNvSpPr/>
+          <p:nvPr/>
+        </p:nvSpPr>
+        <p:spPr>
+          <a:xfrm>
+            <a:off x="914400" y="2029968"/>
+            <a:ext cx="10332720" cy="0"/>
+          </a:xfrm>
+          <a:prstGeom prst="line">
+            <a:avLst/>
+          </a:prstGeom>
+          <a:noFill/>
+          <a:ln w="31750">
+            <a:solidFill>
+              <a:srgbClr val="2C5F2D"/>
+            </a:solidFill>
+            <a:prstDash val="solid"/>
+            <a:tailEnd type="triangle"/>
+          </a:ln>
+        </p:spPr>
+      </p:sp>
+      <p:sp>
+        <p:nvSpPr>
+          <p:cNvPr id="8" name="Shape 6"/>
+          <p:cNvSpPr/>
+          <p:nvPr/>
+        </p:nvSpPr>
+        <p:spPr>
+          <a:xfrm>
+            <a:off x="2478024" y="1947672"/>
+            <a:ext cx="164592" cy="164592"/>
           </a:xfrm>
           <a:prstGeom prst="roundRect">
-            <a:avLst/>
+            <a:avLst>
+              <a:gd name="adj" fmla="val 50000"/>
+            </a:avLst>
+          </a:prstGeom>
+          <a:solidFill>
+            <a:srgbClr val="36454F"/>
+          </a:solidFill>
+          <a:ln/>
+        </p:spPr>
+      </p:sp>
+      <p:sp>
+        <p:nvSpPr>
+          <p:cNvPr id="9" name="Text 7"/>
+          <p:cNvSpPr/>
+          <p:nvPr/>
+        </p:nvSpPr>
+        <p:spPr>
+          <a:xfrm>
+            <a:off x="914400" y="2331720"/>
+            <a:ext cx="3291840" cy="548640"/>
+          </a:xfrm>
+          <a:prstGeom prst="roundRect">
+            <a:avLst>
+              <a:gd name="adj" fmla="val 16667"/>
+            </a:avLst>
+          </a:prstGeom>
+          <a:solidFill>
+            <a:srgbClr val="36454F"/>
+          </a:solidFill>
+          <a:ln/>
+        </p:spPr>
+        <p:txBody>
+          <a:bodyPr wrap="square" rtlCol="0" anchor="ctr"/>
+          <a:lstStyle/>
+          <a:p>
+            <a:pPr algn="ctr" indent="0" marL="0">
+              <a:buNone/>
+            </a:pPr>
+            <a:r>
+              <a:rPr lang="en-US" sz="1400" b="1" dirty="0">
+                <a:solidFill>
+                  <a:srgbClr val="FFFFFF"/>
+                </a:solidFill>
+              </a:rPr>
+              <a:t>これまで（〜2024）</a:t>
+            </a:r>
+            <a:endParaRPr lang="en-US" sz="1400" dirty="0"/>
+          </a:p>
+        </p:txBody>
+      </p:sp>
+      <p:sp>
+        <p:nvSpPr>
+          <p:cNvPr id="10" name="Text 8"/>
+          <p:cNvSpPr/>
+          <p:nvPr/>
+        </p:nvSpPr>
+        <p:spPr>
+          <a:xfrm>
+            <a:off x="914400" y="3063240"/>
+            <a:ext cx="3291840" cy="868680"/>
+          </a:xfrm>
+          <a:prstGeom prst="roundRect">
+            <a:avLst>
+              <a:gd name="adj" fmla="val 8421"/>
+            </a:avLst>
+          </a:prstGeom>
+          <a:solidFill>
+            <a:srgbClr val="FFFFFF"/>
+          </a:solidFill>
+          <a:ln w="12700">
+            <a:solidFill>
+              <a:srgbClr val="E0E0DA"/>
+            </a:solidFill>
+          </a:ln>
+        </p:spPr>
+        <p:txBody>
+          <a:bodyPr wrap="square" rtlCol="0" anchor="ctr"/>
+          <a:lstStyle/>
+          <a:p>
+            <a:pPr algn="l" indent="0" marL="0">
+              <a:lnSpc>
+                <a:spcPct val="100000"/>
+              </a:lnSpc>
+              <a:buNone/>
+            </a:pPr>
+            <a:r>
+              <a:rPr lang="en-US" sz="1250" b="1" dirty="0">
+                <a:solidFill>
+                  <a:srgbClr val="36454F"/>
+                </a:solidFill>
+              </a:rPr>
+              <a:t>1998　</a:t>
+            </a:r>
+            <a:pPr algn="l" indent="0" marL="0">
+              <a:lnSpc>
+                <a:spcPct val="100000"/>
+              </a:lnSpc>
+              <a:buNone/>
+            </a:pPr>
+            <a:r>
+              <a:rPr lang="en-US" sz="1150" dirty="0">
+                <a:solidFill>
+                  <a:srgbClr val="36454F"/>
+                </a:solidFill>
+              </a:rPr>
+              <a:t>創業。積水ハウス不動産の原状回復・リノベを本業に</a:t>
+            </a:r>
+            <a:endParaRPr lang="en-US" sz="1250" dirty="0"/>
+          </a:p>
+        </p:txBody>
+      </p:sp>
+      <p:sp>
+        <p:nvSpPr>
+          <p:cNvPr id="11" name="Text 9"/>
+          <p:cNvSpPr/>
+          <p:nvPr/>
+        </p:nvSpPr>
+        <p:spPr>
+          <a:xfrm>
+            <a:off x="914400" y="4023360"/>
+            <a:ext cx="3291840" cy="868680"/>
+          </a:xfrm>
+          <a:prstGeom prst="roundRect">
+            <a:avLst>
+              <a:gd name="adj" fmla="val 8421"/>
+            </a:avLst>
+          </a:prstGeom>
+          <a:solidFill>
+            <a:srgbClr val="FFFFFF"/>
+          </a:solidFill>
+          <a:ln w="12700">
+            <a:solidFill>
+              <a:srgbClr val="E0E0DA"/>
+            </a:solidFill>
+          </a:ln>
+        </p:spPr>
+        <p:txBody>
+          <a:bodyPr wrap="square" rtlCol="0" anchor="ctr"/>
+          <a:lstStyle/>
+          <a:p>
+            <a:pPr algn="l" indent="0" marL="0">
+              <a:lnSpc>
+                <a:spcPct val="100000"/>
+              </a:lnSpc>
+              <a:buNone/>
+            </a:pPr>
+            <a:r>
+              <a:rPr lang="en-US" sz="1250" b="1" dirty="0">
+                <a:solidFill>
+                  <a:srgbClr val="36454F"/>
+                </a:solidFill>
+              </a:rPr>
+              <a:t>2023　</a:t>
+            </a:r>
+            <a:pPr algn="l" indent="0" marL="0">
+              <a:lnSpc>
+                <a:spcPct val="100000"/>
+              </a:lnSpc>
+              <a:buNone/>
+            </a:pPr>
+            <a:r>
+              <a:rPr lang="en-US" sz="1150" dirty="0">
+                <a:solidFill>
+                  <a:srgbClr val="36454F"/>
+                </a:solidFill>
+              </a:rPr>
+              <a:t>ランドリー事業 開始（コインランドリー moco）</a:t>
+            </a:r>
+            <a:endParaRPr lang="en-US" sz="1250" dirty="0"/>
+          </a:p>
+        </p:txBody>
+      </p:sp>
+      <p:sp>
+        <p:nvSpPr>
+          <p:cNvPr id="12" name="Text 10"/>
+          <p:cNvSpPr/>
+          <p:nvPr/>
+        </p:nvSpPr>
+        <p:spPr>
+          <a:xfrm>
+            <a:off x="914400" y="4983480"/>
+            <a:ext cx="3291840" cy="868680"/>
+          </a:xfrm>
+          <a:prstGeom prst="roundRect">
+            <a:avLst>
+              <a:gd name="adj" fmla="val 8421"/>
+            </a:avLst>
+          </a:prstGeom>
+          <a:solidFill>
+            <a:srgbClr val="FFFFFF"/>
+          </a:solidFill>
+          <a:ln w="12700">
+            <a:solidFill>
+              <a:srgbClr val="E0E0DA"/>
+            </a:solidFill>
+          </a:ln>
+        </p:spPr>
+        <p:txBody>
+          <a:bodyPr wrap="square" rtlCol="0" anchor="ctr"/>
+          <a:lstStyle/>
+          <a:p>
+            <a:pPr algn="l" indent="0" marL="0">
+              <a:lnSpc>
+                <a:spcPct val="100000"/>
+              </a:lnSpc>
+              <a:buNone/>
+            </a:pPr>
+            <a:r>
+              <a:rPr lang="en-US" sz="1250" b="1" dirty="0">
+                <a:solidFill>
+                  <a:srgbClr val="36454F"/>
+                </a:solidFill>
+              </a:rPr>
+              <a:t>2024　</a:t>
+            </a:r>
+            <a:pPr algn="l" indent="0" marL="0">
+              <a:lnSpc>
+                <a:spcPct val="100000"/>
+              </a:lnSpc>
+              <a:buNone/>
+            </a:pPr>
+            <a:r>
+              <a:rPr lang="en-US" sz="1150" dirty="0">
+                <a:solidFill>
+                  <a:srgbClr val="36454F"/>
+                </a:solidFill>
+              </a:rPr>
+              <a:t>サウナ事業に着手（KÖWA SAUNA 開発）</a:t>
+            </a:r>
+            <a:endParaRPr lang="en-US" sz="1250" dirty="0"/>
+          </a:p>
+        </p:txBody>
+      </p:sp>
+      <p:sp>
+        <p:nvSpPr>
+          <p:cNvPr id="13" name="Shape 11"/>
+          <p:cNvSpPr/>
+          <p:nvPr/>
+        </p:nvSpPr>
+        <p:spPr>
+          <a:xfrm>
+            <a:off x="6025896" y="1947672"/>
+            <a:ext cx="164592" cy="164592"/>
+          </a:xfrm>
+          <a:prstGeom prst="roundRect">
+            <a:avLst>
+              <a:gd name="adj" fmla="val 50000"/>
+            </a:avLst>
+          </a:prstGeom>
+          <a:solidFill>
+            <a:srgbClr val="2C5F2D"/>
+          </a:solidFill>
+          <a:ln/>
+        </p:spPr>
+      </p:sp>
+      <p:sp>
+        <p:nvSpPr>
+          <p:cNvPr id="14" name="Text 12"/>
+          <p:cNvSpPr/>
+          <p:nvPr/>
+        </p:nvSpPr>
+        <p:spPr>
+          <a:xfrm>
+            <a:off x="4462272" y="2331720"/>
+            <a:ext cx="3291840" cy="548640"/>
+          </a:xfrm>
+          <a:prstGeom prst="roundRect">
+            <a:avLst>
+              <a:gd name="adj" fmla="val 16667"/>
+            </a:avLst>
+          </a:prstGeom>
+          <a:solidFill>
+            <a:srgbClr val="2C5F2D"/>
+          </a:solidFill>
+          <a:ln/>
+        </p:spPr>
+        <p:txBody>
+          <a:bodyPr wrap="square" rtlCol="0" anchor="ctr"/>
+          <a:lstStyle/>
+          <a:p>
+            <a:pPr algn="ctr" indent="0" marL="0">
+              <a:buNone/>
+            </a:pPr>
+            <a:r>
+              <a:rPr lang="en-US" sz="1400" b="1" dirty="0">
+                <a:solidFill>
+                  <a:srgbClr val="FFFFFF"/>
+                </a:solidFill>
+              </a:rPr>
+              <a:t>いま（2025〜2026）</a:t>
+            </a:r>
+            <a:endParaRPr lang="en-US" sz="1400" dirty="0"/>
+          </a:p>
+        </p:txBody>
+      </p:sp>
+      <p:sp>
+        <p:nvSpPr>
+          <p:cNvPr id="15" name="Text 13"/>
+          <p:cNvSpPr/>
+          <p:nvPr/>
+        </p:nvSpPr>
+        <p:spPr>
+          <a:xfrm>
+            <a:off x="4462272" y="3063240"/>
+            <a:ext cx="3291840" cy="868680"/>
+          </a:xfrm>
+          <a:prstGeom prst="roundRect">
+            <a:avLst>
+              <a:gd name="adj" fmla="val 8421"/>
+            </a:avLst>
+          </a:prstGeom>
+          <a:solidFill>
+            <a:srgbClr val="FFFFFF"/>
+          </a:solidFill>
+          <a:ln w="12700">
+            <a:solidFill>
+              <a:srgbClr val="E0E0DA"/>
+            </a:solidFill>
+          </a:ln>
+        </p:spPr>
+        <p:txBody>
+          <a:bodyPr wrap="square" rtlCol="0" anchor="ctr"/>
+          <a:lstStyle/>
+          <a:p>
+            <a:pPr algn="l" indent="0" marL="0">
+              <a:lnSpc>
+                <a:spcPct val="100000"/>
+              </a:lnSpc>
+              <a:buNone/>
+            </a:pPr>
+            <a:r>
+              <a:rPr lang="en-US" sz="1250" b="1" dirty="0">
+                <a:solidFill>
+                  <a:srgbClr val="2C5F2D"/>
+                </a:solidFill>
+              </a:rPr>
+              <a:t>2025.7　</a:t>
+            </a:r>
+            <a:pPr algn="l" indent="0" marL="0">
+              <a:lnSpc>
+                <a:spcPct val="100000"/>
+              </a:lnSpc>
+              <a:buNone/>
+            </a:pPr>
+            <a:r>
+              <a:rPr lang="en-US" sz="1150" dirty="0">
+                <a:solidFill>
+                  <a:srgbClr val="36454F"/>
+                </a:solidFill>
+              </a:rPr>
+              <a:t>穀物乾燥機の組立を請負（朝日製作所）</a:t>
+            </a:r>
+            <a:endParaRPr lang="en-US" sz="1250" dirty="0"/>
+          </a:p>
+        </p:txBody>
+      </p:sp>
+      <p:sp>
+        <p:nvSpPr>
+          <p:cNvPr id="16" name="Text 14"/>
+          <p:cNvSpPr/>
+          <p:nvPr/>
+        </p:nvSpPr>
+        <p:spPr>
+          <a:xfrm>
+            <a:off x="4462272" y="4023360"/>
+            <a:ext cx="3291840" cy="868680"/>
+          </a:xfrm>
+          <a:prstGeom prst="roundRect">
+            <a:avLst>
+              <a:gd name="adj" fmla="val 8421"/>
+            </a:avLst>
+          </a:prstGeom>
+          <a:solidFill>
+            <a:srgbClr val="FFFFFF"/>
+          </a:solidFill>
+          <a:ln w="12700">
+            <a:solidFill>
+              <a:srgbClr val="E0E0DA"/>
+            </a:solidFill>
+          </a:ln>
+        </p:spPr>
+        <p:txBody>
+          <a:bodyPr wrap="square" rtlCol="0" anchor="ctr"/>
+          <a:lstStyle/>
+          <a:p>
+            <a:pPr algn="l" indent="0" marL="0">
+              <a:lnSpc>
+                <a:spcPct val="100000"/>
+              </a:lnSpc>
+              <a:buNone/>
+            </a:pPr>
+            <a:r>
+              <a:rPr lang="en-US" sz="1250" b="1" dirty="0">
+                <a:solidFill>
+                  <a:srgbClr val="2C5F2D"/>
+                </a:solidFill>
+              </a:rPr>
+              <a:t>2026.7　</a:t>
+            </a:r>
+            <a:pPr algn="l" indent="0" marL="0">
+              <a:lnSpc>
+                <a:spcPct val="100000"/>
+              </a:lnSpc>
+              <a:buNone/>
+            </a:pPr>
+            <a:r>
+              <a:rPr lang="en-US" sz="1150" dirty="0">
+                <a:solidFill>
+                  <a:srgbClr val="36454F"/>
+                </a:solidFill>
+              </a:rPr>
+              <a:t>ランドリー周辺の新規業務が本格化</a:t>
+            </a:r>
+            <a:endParaRPr lang="en-US" sz="1250" dirty="0"/>
+          </a:p>
+        </p:txBody>
+      </p:sp>
+      <p:sp>
+        <p:nvSpPr>
+          <p:cNvPr id="17" name="Text 15"/>
+          <p:cNvSpPr/>
+          <p:nvPr/>
+        </p:nvSpPr>
+        <p:spPr>
+          <a:xfrm>
+            <a:off x="4462272" y="4983480"/>
+            <a:ext cx="3291840" cy="868680"/>
+          </a:xfrm>
+          <a:prstGeom prst="roundRect">
+            <a:avLst>
+              <a:gd name="adj" fmla="val 8421"/>
+            </a:avLst>
+          </a:prstGeom>
+          <a:solidFill>
+            <a:srgbClr val="FFFFFF"/>
+          </a:solidFill>
+          <a:ln w="12700">
+            <a:solidFill>
+              <a:srgbClr val="E0E0DA"/>
+            </a:solidFill>
+          </a:ln>
+        </p:spPr>
+        <p:txBody>
+          <a:bodyPr wrap="square" rtlCol="0" anchor="ctr"/>
+          <a:lstStyle/>
+          <a:p>
+            <a:pPr algn="l" indent="0" marL="0">
+              <a:lnSpc>
+                <a:spcPct val="100000"/>
+              </a:lnSpc>
+              <a:buNone/>
+            </a:pPr>
+            <a:r>
+              <a:rPr lang="en-US" sz="1250" b="1" dirty="0">
+                <a:solidFill>
+                  <a:srgbClr val="2C5F2D"/>
+                </a:solidFill>
+              </a:rPr>
+              <a:t>2026.8　</a:t>
+            </a:r>
+            <a:pPr algn="l" indent="0" marL="0">
+              <a:lnSpc>
+                <a:spcPct val="100000"/>
+              </a:lnSpc>
+              <a:buNone/>
+            </a:pPr>
+            <a:r>
+              <a:rPr lang="en-US" sz="1150" dirty="0">
+                <a:solidFill>
+                  <a:srgbClr val="36454F"/>
+                </a:solidFill>
+              </a:rPr>
+              <a:t>新体制スタート・ウェルネス事業 開始</a:t>
+            </a:r>
+            <a:endParaRPr lang="en-US" sz="1250" dirty="0"/>
+          </a:p>
+        </p:txBody>
+      </p:sp>
+      <p:sp>
+        <p:nvSpPr>
+          <p:cNvPr id="18" name="Shape 16"/>
+          <p:cNvSpPr/>
+          <p:nvPr/>
+        </p:nvSpPr>
+        <p:spPr>
+          <a:xfrm>
+            <a:off x="9573768" y="1947672"/>
+            <a:ext cx="164592" cy="164592"/>
+          </a:xfrm>
+          <a:prstGeom prst="roundRect">
+            <a:avLst>
+              <a:gd name="adj" fmla="val 50000"/>
+            </a:avLst>
           </a:prstGeom>
           <a:solidFill>
             <a:srgbClr val="C9742E"/>
@@ -6763,166 +9068,224 @@
       </p:sp>
       <p:sp>
         <p:nvSpPr>
-          <p:cNvPr id="4" name="Text 2"/>
-          <p:cNvSpPr/>
-          <p:nvPr/>
-        </p:nvSpPr>
-        <p:spPr>
-          <a:xfrm>
-            <a:off x="914400" y="777240"/>
-            <a:ext cx="10332720" cy="457200"/>
-          </a:xfrm>
-          <a:prstGeom prst="rect">
-            <a:avLst/>
-          </a:prstGeom>
-          <a:noFill/>
-          <a:ln/>
-        </p:spPr>
-        <p:txBody>
-          <a:bodyPr wrap="square" rtlCol="0" anchor="ctr"/>
-          <a:lstStyle/>
-          <a:p>
-            <a:pPr algn="l" indent="0" marL="0">
-              <a:buNone/>
-            </a:pPr>
-            <a:r>
-              <a:rPr lang="en-US" sz="1500" b="1" dirty="0">
-                <a:solidFill>
-                  <a:srgbClr val="CFE3CF"/>
-                </a:solidFill>
-              </a:rPr>
-              <a:t>私たちのビジョン</a:t>
-            </a:r>
-            <a:endParaRPr lang="en-US" sz="1500" dirty="0"/>
-          </a:p>
-        </p:txBody>
-      </p:sp>
-      <p:sp>
-        <p:nvSpPr>
-          <p:cNvPr id="5" name="Text 3"/>
-          <p:cNvSpPr/>
-          <p:nvPr/>
-        </p:nvSpPr>
-        <p:spPr>
-          <a:xfrm>
-            <a:off x="868680" y="2286000"/>
-            <a:ext cx="10515600" cy="1828800"/>
-          </a:xfrm>
-          <a:prstGeom prst="rect">
-            <a:avLst/>
-          </a:prstGeom>
-          <a:noFill/>
-          <a:ln/>
-        </p:spPr>
-        <p:txBody>
-          <a:bodyPr wrap="square" rtlCol="0" anchor="ctr"/>
-          <a:lstStyle/>
-          <a:p>
-            <a:pPr algn="l" indent="0" marL="0">
-              <a:lnSpc>
-                <a:spcPct val="112000"/>
-              </a:lnSpc>
-              <a:buNone/>
-            </a:pPr>
-            <a:r>
-              <a:rPr lang="en-US" sz="3000" b="1" dirty="0">
-                <a:solidFill>
-                  <a:srgbClr val="CFE3CF"/>
-                </a:solidFill>
-              </a:rPr>
-              <a:t>「住まいの会社」から、</a:t>
-            </a:r>
-            <a:endParaRPr lang="en-US" sz="3000" dirty="0"/>
-          </a:p>
-          <a:p>
-            <a:pPr algn="l" indent="0" marL="0">
-              <a:lnSpc>
-                <a:spcPct val="112000"/>
-              </a:lnSpc>
-              <a:buNone/>
-            </a:pPr>
-            <a:r>
-              <a:rPr lang="en-US" sz="4000" b="1" dirty="0">
+          <p:cNvPr id="19" name="Text 17"/>
+          <p:cNvSpPr/>
+          <p:nvPr/>
+        </p:nvSpPr>
+        <p:spPr>
+          <a:xfrm>
+            <a:off x="8010144" y="2331720"/>
+            <a:ext cx="3291840" cy="548640"/>
+          </a:xfrm>
+          <a:prstGeom prst="roundRect">
+            <a:avLst>
+              <a:gd name="adj" fmla="val 16667"/>
+            </a:avLst>
+          </a:prstGeom>
+          <a:solidFill>
+            <a:srgbClr val="C9742E"/>
+          </a:solidFill>
+          <a:ln/>
+        </p:spPr>
+        <p:txBody>
+          <a:bodyPr wrap="square" rtlCol="0" anchor="ctr"/>
+          <a:lstStyle/>
+          <a:p>
+            <a:pPr algn="ctr" indent="0" marL="0">
+              <a:buNone/>
+            </a:pPr>
+            <a:r>
+              <a:rPr lang="en-US" sz="1400" b="1" dirty="0">
                 <a:solidFill>
                   <a:srgbClr val="FFFFFF"/>
                 </a:solidFill>
               </a:rPr>
-              <a:t>大和町発・“暮らしと健康”の</a:t>
-            </a:r>
-            <a:endParaRPr lang="en-US" sz="3000" dirty="0"/>
-          </a:p>
-          <a:p>
-            <a:pPr algn="l" indent="0" marL="0">
-              <a:lnSpc>
-                <a:spcPct val="112000"/>
-              </a:lnSpc>
-              <a:buNone/>
-            </a:pPr>
-            <a:r>
-              <a:rPr lang="en-US" sz="4000" b="1" dirty="0">
-                <a:solidFill>
-                  <a:srgbClr val="FFFFFF"/>
-                </a:solidFill>
-              </a:rPr>
-              <a:t>地域プラットフォームへ。</a:t>
-            </a:r>
-            <a:endParaRPr lang="en-US" sz="3000" dirty="0"/>
-          </a:p>
-        </p:txBody>
-      </p:sp>
-      <p:sp>
-        <p:nvSpPr>
-          <p:cNvPr id="6" name="Text 4"/>
-          <p:cNvSpPr/>
-          <p:nvPr/>
-        </p:nvSpPr>
-        <p:spPr>
-          <a:xfrm>
-            <a:off x="914400" y="4937760"/>
-            <a:ext cx="10332720" cy="1005840"/>
-          </a:xfrm>
-          <a:prstGeom prst="rect">
-            <a:avLst/>
-          </a:prstGeom>
-          <a:noFill/>
-          <a:ln/>
-        </p:spPr>
-        <p:txBody>
-          <a:bodyPr wrap="square" rtlCol="0" anchor="ctr"/>
-          <a:lstStyle/>
-          <a:p>
-            <a:pPr algn="l" indent="0" marL="0">
-              <a:lnSpc>
-                <a:spcPct val="110000"/>
-              </a:lnSpc>
-              <a:buNone/>
-            </a:pPr>
-            <a:r>
-              <a:rPr lang="en-US" sz="2000" b="1" dirty="0">
-                <a:solidFill>
-                  <a:srgbClr val="F0F6F0"/>
-                </a:solidFill>
-              </a:rPr>
-              <a:t>直す力で、人を、地域を、社会を、整えていく。</a:t>
-            </a:r>
-            <a:endParaRPr lang="en-US" sz="2000" dirty="0"/>
-          </a:p>
-          <a:p>
-            <a:pPr algn="l" indent="0" marL="0">
-              <a:lnSpc>
-                <a:spcPct val="110000"/>
-              </a:lnSpc>
-              <a:buNone/>
-            </a:pPr>
-            <a:r>
-              <a:rPr lang="en-US" sz="2000" b="1" dirty="0">
-                <a:solidFill>
-                  <a:srgbClr val="F0F6F0"/>
-                </a:solidFill>
-              </a:rPr>
-              <a:t>宮城の“ととのう暮らし”をつくる会社に。</a:t>
-            </a:r>
-            <a:endParaRPr lang="en-US" sz="2000" dirty="0"/>
+              <a:t>これから（2027〜）</a:t>
+            </a:r>
+            <a:endParaRPr lang="en-US" sz="1400" dirty="0"/>
+          </a:p>
+        </p:txBody>
+      </p:sp>
+      <p:sp>
+        <p:nvSpPr>
+          <p:cNvPr id="20" name="Text 18"/>
+          <p:cNvSpPr/>
+          <p:nvPr/>
+        </p:nvSpPr>
+        <p:spPr>
+          <a:xfrm>
+            <a:off x="8010144" y="3063240"/>
+            <a:ext cx="3291840" cy="868680"/>
+          </a:xfrm>
+          <a:prstGeom prst="roundRect">
+            <a:avLst>
+              <a:gd name="adj" fmla="val 8421"/>
+            </a:avLst>
+          </a:prstGeom>
+          <a:solidFill>
+            <a:srgbClr val="FFFFFF"/>
+          </a:solidFill>
+          <a:ln w="12700">
+            <a:solidFill>
+              <a:srgbClr val="E0E0DA"/>
+            </a:solidFill>
+          </a:ln>
+        </p:spPr>
+        <p:txBody>
+          <a:bodyPr wrap="square" rtlCol="0" anchor="ctr"/>
+          <a:lstStyle/>
+          <a:p>
+            <a:pPr algn="l" indent="0" marL="0">
+              <a:lnSpc>
+                <a:spcPct val="100000"/>
+              </a:lnSpc>
+              <a:buNone/>
+            </a:pPr>
+            <a:r>
+              <a:rPr lang="en-US" sz="1250" b="1" dirty="0">
+                <a:solidFill>
+                  <a:srgbClr val="C9742E"/>
+                </a:solidFill>
+              </a:rPr>
+              <a:t>2027〜　</a:t>
+            </a:r>
+            <a:pPr algn="l" indent="0" marL="0">
+              <a:lnSpc>
+                <a:spcPct val="100000"/>
+              </a:lnSpc>
+              <a:buNone/>
+            </a:pPr>
+            <a:r>
+              <a:rPr lang="en-US" sz="1150" dirty="0">
+                <a:solidFill>
+                  <a:srgbClr val="36454F"/>
+                </a:solidFill>
+              </a:rPr>
+              <a:t>サウナ体験型ショールームを展開</a:t>
+            </a:r>
+            <a:endParaRPr lang="en-US" sz="1250" dirty="0"/>
+          </a:p>
+        </p:txBody>
+      </p:sp>
+      <p:sp>
+        <p:nvSpPr>
+          <p:cNvPr id="21" name="Text 19"/>
+          <p:cNvSpPr/>
+          <p:nvPr/>
+        </p:nvSpPr>
+        <p:spPr>
+          <a:xfrm>
+            <a:off x="8010144" y="4023360"/>
+            <a:ext cx="3291840" cy="868680"/>
+          </a:xfrm>
+          <a:prstGeom prst="roundRect">
+            <a:avLst>
+              <a:gd name="adj" fmla="val 8421"/>
+            </a:avLst>
+          </a:prstGeom>
+          <a:solidFill>
+            <a:srgbClr val="FFFFFF"/>
+          </a:solidFill>
+          <a:ln w="12700">
+            <a:solidFill>
+              <a:srgbClr val="E0E0DA"/>
+            </a:solidFill>
+          </a:ln>
+        </p:spPr>
+        <p:txBody>
+          <a:bodyPr wrap="square" rtlCol="0" anchor="ctr"/>
+          <a:lstStyle/>
+          <a:p>
+            <a:pPr algn="l" indent="0" marL="0">
+              <a:lnSpc>
+                <a:spcPct val="100000"/>
+              </a:lnSpc>
+              <a:buNone/>
+            </a:pPr>
+            <a:r>
+              <a:rPr lang="en-US" sz="1250" b="1" dirty="0">
+                <a:solidFill>
+                  <a:srgbClr val="C9742E"/>
+                </a:solidFill>
+              </a:rPr>
+              <a:t>約2年後　</a:t>
+            </a:r>
+            <a:pPr algn="l" indent="0" marL="0">
+              <a:lnSpc>
+                <a:spcPct val="100000"/>
+              </a:lnSpc>
+              <a:buNone/>
+            </a:pPr>
+            <a:r>
+              <a:rPr lang="en-US" sz="1150" dirty="0">
+                <a:solidFill>
+                  <a:srgbClr val="36454F"/>
+                </a:solidFill>
+              </a:rPr>
+              <a:t>カフェ：POPUP → クラファン → 店舗出店</a:t>
+            </a:r>
+            <a:endParaRPr lang="en-US" sz="1250" dirty="0"/>
+          </a:p>
+        </p:txBody>
+      </p:sp>
+      <p:sp>
+        <p:nvSpPr>
+          <p:cNvPr id="22" name="Text 20"/>
+          <p:cNvSpPr/>
+          <p:nvPr/>
+        </p:nvSpPr>
+        <p:spPr>
+          <a:xfrm>
+            <a:off x="8010144" y="4983480"/>
+            <a:ext cx="3291840" cy="868680"/>
+          </a:xfrm>
+          <a:prstGeom prst="roundRect">
+            <a:avLst>
+              <a:gd name="adj" fmla="val 8421"/>
+            </a:avLst>
+          </a:prstGeom>
+          <a:solidFill>
+            <a:srgbClr val="FFFFFF"/>
+          </a:solidFill>
+          <a:ln w="12700">
+            <a:solidFill>
+              <a:srgbClr val="E0E0DA"/>
+            </a:solidFill>
+          </a:ln>
+        </p:spPr>
+        <p:txBody>
+          <a:bodyPr wrap="square" rtlCol="0" anchor="ctr"/>
+          <a:lstStyle/>
+          <a:p>
+            <a:pPr algn="l" indent="0" marL="0">
+              <a:lnSpc>
+                <a:spcPct val="100000"/>
+              </a:lnSpc>
+              <a:buNone/>
+            </a:pPr>
+            <a:r>
+              <a:rPr lang="en-US" sz="1250" b="1" dirty="0">
+                <a:solidFill>
+                  <a:srgbClr val="C9742E"/>
+                </a:solidFill>
+              </a:rPr>
+              <a:t>目標　</a:t>
+            </a:r>
+            <a:pPr algn="l" indent="0" marL="0">
+              <a:lnSpc>
+                <a:spcPct val="100000"/>
+              </a:lnSpc>
+              <a:buNone/>
+            </a:pPr>
+            <a:r>
+              <a:rPr lang="en-US" sz="1150" dirty="0">
+                <a:solidFill>
+                  <a:srgbClr val="36454F"/>
+                </a:solidFill>
+              </a:rPr>
+              <a:t>5事業で年商7億円へ</a:t>
+            </a:r>
+            <a:endParaRPr lang="en-US" sz="1250" dirty="0"/>
           </a:p>
         </p:txBody>
       </p:sp>

--- a/光和工業_ビジョン資料.pptx
+++ b/光和工業_ビジョン資料.pptx
@@ -17,9 +17,10 @@
     <p:sldId id="265" r:id="rId11"/>
     <p:sldId id="266" r:id="rId12"/>
     <p:sldId id="267" r:id="rId13"/>
+    <p:sldId id="268" r:id="rId14"/>
   </p:sldIdLst>
   <p:notesMasterIdLst>
-    <p:notesMasterId r:id="rId14"/>
+    <p:notesMasterId r:id="rId15"/>
   </p:notesMasterIdLst>
   <p:sldSz cx="12191695" cy="6858000"/>
   <p:notesSz cx="6858000" cy="12191695"/>
@@ -819,6 +820,94 @@
 </p:notes>
 </file>
 
+<file path=ppt/notesSlides/notesSlide13.xml><?xml version="1.0" encoding="utf-8"?>
+<p:notes xmlns:a="http://schemas.openxmlformats.org/drawingml/2006/main" xmlns:r="http://schemas.openxmlformats.org/officeDocument/2006/relationships" xmlns:p="http://schemas.openxmlformats.org/presentationml/2006/main">
+  <p:cSld>
+    <p:spTree>
+      <p:nvGrpSpPr>
+        <p:cNvPr id="1" name=""/>
+        <p:cNvGrpSpPr/>
+        <p:nvPr/>
+      </p:nvGrpSpPr>
+      <p:grpSpPr>
+        <a:xfrm>
+          <a:off x="0" y="0"/>
+          <a:ext cx="0" cy="0"/>
+          <a:chOff x="0" y="0"/>
+          <a:chExt cx="0" cy="0"/>
+        </a:xfrm>
+      </p:grpSpPr>
+      <p:sp>
+        <p:nvSpPr>
+          <p:cNvPr id="2" name="Slide Image Placeholder 1"/>
+          <p:cNvSpPr>
+            <a:spLocks noGrp="1" noRot="1" noChangeAspect="1"/>
+          </p:cNvSpPr>
+          <p:nvPr>
+            <p:ph type="sldImg"/>
+          </p:nvPr>
+        </p:nvSpPr>
+        <p:spPr/>
+      </p:sp>
+      <p:sp>
+        <p:nvSpPr>
+          <p:cNvPr id="3" name="Notes Placeholder 2"/>
+          <p:cNvSpPr>
+            <a:spLocks noGrp="1"/>
+          </p:cNvSpPr>
+          <p:nvPr>
+            <p:ph type="body" idx="1"/>
+          </p:nvPr>
+        </p:nvSpPr>
+        <p:spPr/>
+        <p:txBody>
+          <a:bodyPr/>
+          <a:lstStyle/>
+          <a:p>
+            <a:r>
+              <a:rPr lang="en-US" dirty="0"/>
+              <a:t/>
+            </a:r>
+            <a:endParaRPr lang="en-US" dirty="0"/>
+          </a:p>
+        </p:txBody>
+      </p:sp>
+      <p:sp>
+        <p:nvSpPr>
+          <p:cNvPr id="4" name="Slide Number Placeholder 3"/>
+          <p:cNvSpPr>
+            <a:spLocks noGrp="1"/>
+          </p:cNvSpPr>
+          <p:nvPr>
+            <p:ph type="sldNum" sz="quarter" idx="10"/>
+          </p:nvPr>
+        </p:nvSpPr>
+        <p:spPr/>
+        <p:txBody>
+          <a:bodyPr/>
+          <a:lstStyle/>
+          <a:p>
+            <a:fld id="{F7021451-1387-4CA6-816F-3879F97B5CBC}" type="slidenum">
+              <a:rPr lang="en-US"/>
+              <a:t>13</a:t>
+            </a:fld>
+            <a:endParaRPr lang="en-US"/>
+          </a:p>
+        </p:txBody>
+      </p:sp>
+    </p:spTree>
+    <p:extLst>
+      <p:ext uri="{BB962C8B-B14F-4D97-AF65-F5344CB8AC3E}">
+        <p14:creationId xmlns:p14="http://schemas.microsoft.com/office/powerpoint/2010/main" val="1024086991"/>
+      </p:ext>
+    </p:extLst>
+  </p:cSld>
+  <p:clrMapOvr>
+    <a:masterClrMapping/>
+  </p:clrMapOvr>
+</p:notes>
+</file>
+
 <file path=ppt/notesSlides/notesSlide2.xml><?xml version="1.0" encoding="utf-8"?>
 <p:notes xmlns:a="http://schemas.openxmlformats.org/drawingml/2006/main" xmlns:r="http://schemas.openxmlformats.org/officeDocument/2006/relationships" xmlns:p="http://schemas.openxmlformats.org/presentationml/2006/main">
   <p:cSld>
@@ -2272,7 +2361,7 @@
                   <a:srgbClr val="8A8A8A"/>
                 </a:solidFill>
               </a:rPr>
-              <a:t>有限会社 光和工業（宮城県黒川郡大和町・1998年創業）</a:t>
+              <a:t>有限会社 光和工業（宮城県黒川郡大和町・1997年創業）</a:t>
             </a:r>
             <a:endParaRPr lang="en-US" sz="1200" dirty="0"/>
           </a:p>
@@ -3167,7 +3256,7 @@
                   <a:srgbClr val="36454F"/>
                 </a:solidFill>
               </a:rPr>
-              <a:t>第2の柱へ</a:t>
+              <a:t>現状 約1億 → 倍増へ</a:t>
             </a:r>
             <a:endParaRPr lang="en-US" sz="950" dirty="0"/>
           </a:p>
@@ -3477,7 +3566,7 @@
                   <a:srgbClr val="36454F"/>
                 </a:solidFill>
               </a:rPr>
-              <a:t>これからの種</a:t>
+              <a:t>現状ほぼ0 → 育てる</a:t>
             </a:r>
             <a:endParaRPr lang="en-US" sz="950" dirty="0"/>
           </a:p>
@@ -3513,7 +3602,7 @@
                   <a:srgbClr val="36454F"/>
                 </a:solidFill>
               </a:rPr>
-              <a:t>本業（約4.3億の工事実績）を土台に、ランドリーと新規事業を伸ばして＋2.35億。全体で7億へ。</a:t>
+              <a:t>本業（約4.3億の工事実績）を土台に、ランドリー（現状約1億）を倍増、新規事業1億を加えて7億へ。</a:t>
             </a:r>
             <a:endParaRPr lang="en-US" sz="1200" dirty="0"/>
           </a:p>
@@ -3530,6 +3619,636 @@
 <file path=ppt/slides/slide11.xml><?xml version="1.0" encoding="utf-8"?>
 <p:sld xmlns:a="http://schemas.openxmlformats.org/drawingml/2006/main" xmlns:r="http://schemas.openxmlformats.org/officeDocument/2006/relationships" xmlns:p="http://schemas.openxmlformats.org/presentationml/2006/main">
   <p:cSld name="Slide 11">
+    <p:bg>
+      <p:bgPr>
+        <a:solidFill>
+          <a:srgbClr val="F5F5F2"/>
+        </a:solidFill>
+      </p:bgPr>
+    </p:bg>
+    <p:spTree>
+      <p:nvGrpSpPr>
+        <p:cNvPr id="1" name=""/>
+        <p:cNvGrpSpPr/>
+        <p:nvPr/>
+      </p:nvGrpSpPr>
+      <p:grpSpPr>
+        <a:xfrm>
+          <a:off x="0" y="0"/>
+          <a:ext cx="0" cy="0"/>
+          <a:chOff x="0" y="0"/>
+          <a:chExt cx="0" cy="0"/>
+        </a:xfrm>
+      </p:grpSpPr>
+      <p:sp>
+        <p:nvSpPr>
+          <p:cNvPr id="2" name="Shape 0"/>
+          <p:cNvSpPr/>
+          <p:nvPr/>
+        </p:nvSpPr>
+        <p:spPr>
+          <a:xfrm>
+            <a:off x="502920" y="566928"/>
+            <a:ext cx="128016" cy="713232"/>
+          </a:xfrm>
+          <a:prstGeom prst="roundRect">
+            <a:avLst>
+              <a:gd name="adj" fmla="val 28571"/>
+            </a:avLst>
+          </a:prstGeom>
+          <a:solidFill>
+            <a:srgbClr val="2C5F2D"/>
+          </a:solidFill>
+          <a:ln/>
+        </p:spPr>
+      </p:sp>
+      <p:sp>
+        <p:nvSpPr>
+          <p:cNvPr id="3" name="Text 1"/>
+          <p:cNvSpPr/>
+          <p:nvPr/>
+        </p:nvSpPr>
+        <p:spPr>
+          <a:xfrm>
+            <a:off x="777240" y="530352"/>
+            <a:ext cx="10515600" cy="310896"/>
+          </a:xfrm>
+          <a:prstGeom prst="rect">
+            <a:avLst/>
+          </a:prstGeom>
+          <a:noFill/>
+          <a:ln/>
+        </p:spPr>
+        <p:txBody>
+          <a:bodyPr wrap="square" rtlCol="0" anchor="ctr"/>
+          <a:lstStyle/>
+          <a:p>
+            <a:pPr algn="l" indent="0" marL="0">
+              <a:buNone/>
+            </a:pPr>
+            <a:r>
+              <a:rPr lang="en-US" sz="1300" b="1" dirty="0">
+                <a:solidFill>
+                  <a:srgbClr val="C9742E"/>
+                </a:solidFill>
+              </a:rPr>
+              <a:t>投資と資源</a:t>
+            </a:r>
+            <a:endParaRPr lang="en-US" sz="1300" dirty="0"/>
+          </a:p>
+        </p:txBody>
+      </p:sp>
+      <p:sp>
+        <p:nvSpPr>
+          <p:cNvPr id="4" name="Text 2"/>
+          <p:cNvSpPr/>
+          <p:nvPr/>
+        </p:nvSpPr>
+        <p:spPr>
+          <a:xfrm>
+            <a:off x="749808" y="841248"/>
+            <a:ext cx="10789920" cy="640080"/>
+          </a:xfrm>
+          <a:prstGeom prst="rect">
+            <a:avLst/>
+          </a:prstGeom>
+          <a:noFill/>
+          <a:ln/>
+        </p:spPr>
+        <p:txBody>
+          <a:bodyPr wrap="square" rtlCol="0" anchor="ctr"/>
+          <a:lstStyle/>
+          <a:p>
+            <a:pPr algn="l" indent="0" marL="0">
+              <a:buNone/>
+            </a:pPr>
+            <a:r>
+              <a:rPr lang="en-US" sz="2700" b="1" dirty="0">
+                <a:solidFill>
+                  <a:srgbClr val="2C5F2D"/>
+                </a:solidFill>
+              </a:rPr>
+              <a:t>7億への原資を、どう生み出すか。</a:t>
+            </a:r>
+            <a:endParaRPr lang="en-US" sz="2700" dirty="0"/>
+          </a:p>
+        </p:txBody>
+      </p:sp>
+      <p:sp>
+        <p:nvSpPr>
+          <p:cNvPr id="5" name="Shape 3"/>
+          <p:cNvSpPr/>
+          <p:nvPr/>
+        </p:nvSpPr>
+        <p:spPr>
+          <a:xfrm>
+            <a:off x="777240" y="1572768"/>
+            <a:ext cx="10607040" cy="0"/>
+          </a:xfrm>
+          <a:prstGeom prst="line">
+            <a:avLst/>
+          </a:prstGeom>
+          <a:noFill/>
+          <a:ln w="19050">
+            <a:solidFill>
+              <a:srgbClr val="D8D8D2"/>
+            </a:solidFill>
+            <a:prstDash val="solid"/>
+          </a:ln>
+        </p:spPr>
+      </p:sp>
+      <p:sp>
+        <p:nvSpPr>
+          <p:cNvPr id="6" name="Text 4"/>
+          <p:cNvSpPr/>
+          <p:nvPr/>
+        </p:nvSpPr>
+        <p:spPr>
+          <a:xfrm>
+            <a:off x="11155680" y="6382512"/>
+            <a:ext cx="822960" cy="310896"/>
+          </a:xfrm>
+          <a:prstGeom prst="rect">
+            <a:avLst/>
+          </a:prstGeom>
+          <a:noFill/>
+          <a:ln/>
+        </p:spPr>
+        <p:txBody>
+          <a:bodyPr wrap="square" rtlCol="0" anchor="ctr"/>
+          <a:lstStyle/>
+          <a:p>
+            <a:pPr algn="r" indent="0" marL="0">
+              <a:buNone/>
+            </a:pPr>
+            <a:r>
+              <a:rPr lang="en-US" sz="1100" dirty="0">
+                <a:solidFill>
+                  <a:srgbClr val="8A8A8A"/>
+                </a:solidFill>
+              </a:rPr>
+              <a:t>11</a:t>
+            </a:r>
+            <a:endParaRPr lang="en-US" sz="1100" dirty="0"/>
+          </a:p>
+        </p:txBody>
+      </p:sp>
+      <p:sp>
+        <p:nvSpPr>
+          <p:cNvPr id="7" name="Shape 5"/>
+          <p:cNvSpPr/>
+          <p:nvPr/>
+        </p:nvSpPr>
+        <p:spPr>
+          <a:xfrm>
+            <a:off x="914400" y="1920240"/>
+            <a:ext cx="109728" cy="1463040"/>
+          </a:xfrm>
+          <a:prstGeom prst="roundRect">
+            <a:avLst>
+              <a:gd name="adj" fmla="val 25000"/>
+            </a:avLst>
+          </a:prstGeom>
+          <a:solidFill>
+            <a:srgbClr val="2C5F2D"/>
+          </a:solidFill>
+          <a:ln/>
+        </p:spPr>
+      </p:sp>
+      <p:sp>
+        <p:nvSpPr>
+          <p:cNvPr id="8" name="Text 6"/>
+          <p:cNvSpPr/>
+          <p:nvPr/>
+        </p:nvSpPr>
+        <p:spPr>
+          <a:xfrm>
+            <a:off x="1170432" y="1901952"/>
+            <a:ext cx="4754880" cy="457200"/>
+          </a:xfrm>
+          <a:prstGeom prst="rect">
+            <a:avLst/>
+          </a:prstGeom>
+          <a:noFill/>
+          <a:ln/>
+        </p:spPr>
+        <p:txBody>
+          <a:bodyPr wrap="square" rtlCol="0" anchor="ctr"/>
+          <a:lstStyle/>
+          <a:p>
+            <a:pPr algn="l" indent="0" marL="0">
+              <a:buNone/>
+            </a:pPr>
+            <a:r>
+              <a:rPr lang="en-US" sz="1600" b="1" dirty="0">
+                <a:solidFill>
+                  <a:srgbClr val="2C5F2D"/>
+                </a:solidFill>
+              </a:rPr>
+              <a:t>内部資金（自前のキャッシュ）</a:t>
+            </a:r>
+            <a:endParaRPr lang="en-US" sz="1600" dirty="0"/>
+          </a:p>
+        </p:txBody>
+      </p:sp>
+      <p:sp>
+        <p:nvSpPr>
+          <p:cNvPr id="9" name="Text 7"/>
+          <p:cNvSpPr/>
+          <p:nvPr/>
+        </p:nvSpPr>
+        <p:spPr>
+          <a:xfrm>
+            <a:off x="1170432" y="2377440"/>
+            <a:ext cx="4754880" cy="960120"/>
+          </a:xfrm>
+          <a:prstGeom prst="rect">
+            <a:avLst/>
+          </a:prstGeom>
+          <a:noFill/>
+          <a:ln/>
+        </p:spPr>
+        <p:txBody>
+          <a:bodyPr wrap="square" rtlCol="0" anchor="t"/>
+          <a:lstStyle/>
+          <a:p>
+            <a:pPr algn="l" indent="0" marL="0">
+              <a:lnSpc>
+                <a:spcPct val="110000"/>
+              </a:lnSpc>
+              <a:buNone/>
+            </a:pPr>
+            <a:r>
+              <a:rPr lang="en-US" sz="1300" dirty="0">
+                <a:solidFill>
+                  <a:srgbClr val="36454F"/>
+                </a:solidFill>
+              </a:rPr>
+              <a:t>本業の利益と減価償却で、年あたり数千万円規模の投資余力。手元資金も約7,800万円。まず自分たちの稼ぎを元手にする。</a:t>
+            </a:r>
+            <a:endParaRPr lang="en-US" sz="1300" dirty="0"/>
+          </a:p>
+        </p:txBody>
+      </p:sp>
+      <p:sp>
+        <p:nvSpPr>
+          <p:cNvPr id="10" name="Shape 8"/>
+          <p:cNvSpPr/>
+          <p:nvPr/>
+        </p:nvSpPr>
+        <p:spPr>
+          <a:xfrm>
+            <a:off x="6263640" y="1920240"/>
+            <a:ext cx="109728" cy="1463040"/>
+          </a:xfrm>
+          <a:prstGeom prst="roundRect">
+            <a:avLst>
+              <a:gd name="adj" fmla="val 25000"/>
+            </a:avLst>
+          </a:prstGeom>
+          <a:solidFill>
+            <a:srgbClr val="1C7293"/>
+          </a:solidFill>
+          <a:ln/>
+        </p:spPr>
+      </p:sp>
+      <p:sp>
+        <p:nvSpPr>
+          <p:cNvPr id="11" name="Text 9"/>
+          <p:cNvSpPr/>
+          <p:nvPr/>
+        </p:nvSpPr>
+        <p:spPr>
+          <a:xfrm>
+            <a:off x="6519672" y="1901952"/>
+            <a:ext cx="4754880" cy="457200"/>
+          </a:xfrm>
+          <a:prstGeom prst="rect">
+            <a:avLst/>
+          </a:prstGeom>
+          <a:noFill/>
+          <a:ln/>
+        </p:spPr>
+        <p:txBody>
+          <a:bodyPr wrap="square" rtlCol="0" anchor="ctr"/>
+          <a:lstStyle/>
+          <a:p>
+            <a:pPr algn="l" indent="0" marL="0">
+              <a:buNone/>
+            </a:pPr>
+            <a:r>
+              <a:rPr lang="en-US" sz="1600" b="1" dirty="0">
+                <a:solidFill>
+                  <a:srgbClr val="1C7293"/>
+                </a:solidFill>
+              </a:rPr>
+              <a:t>自社の資産を活かす</a:t>
+            </a:r>
+            <a:endParaRPr lang="en-US" sz="1600" dirty="0"/>
+          </a:p>
+        </p:txBody>
+      </p:sp>
+      <p:sp>
+        <p:nvSpPr>
+          <p:cNvPr id="12" name="Text 10"/>
+          <p:cNvSpPr/>
+          <p:nvPr/>
+        </p:nvSpPr>
+        <p:spPr>
+          <a:xfrm>
+            <a:off x="6519672" y="2377440"/>
+            <a:ext cx="4754880" cy="960120"/>
+          </a:xfrm>
+          <a:prstGeom prst="rect">
+            <a:avLst/>
+          </a:prstGeom>
+          <a:noFill/>
+          <a:ln/>
+        </p:spPr>
+        <p:txBody>
+          <a:bodyPr wrap="square" rtlCol="0" anchor="t"/>
+          <a:lstStyle/>
+          <a:p>
+            <a:pPr algn="l" indent="0" marL="0">
+              <a:lnSpc>
+                <a:spcPct val="110000"/>
+              </a:lnSpc>
+              <a:buNone/>
+            </a:pPr>
+            <a:r>
+              <a:rPr lang="en-US" sz="1300" dirty="0">
+                <a:solidFill>
+                  <a:srgbClr val="36454F"/>
+                </a:solidFill>
+              </a:rPr>
+              <a:t>本社・仙台のランドリー・アパートなど、自社で持つ土地建物（約8億円規模）を、新しい事業の「場」として転用する。</a:t>
+            </a:r>
+            <a:endParaRPr lang="en-US" sz="1300" dirty="0"/>
+          </a:p>
+        </p:txBody>
+      </p:sp>
+      <p:sp>
+        <p:nvSpPr>
+          <p:cNvPr id="13" name="Shape 11"/>
+          <p:cNvSpPr/>
+          <p:nvPr/>
+        </p:nvSpPr>
+        <p:spPr>
+          <a:xfrm>
+            <a:off x="914400" y="3520440"/>
+            <a:ext cx="109728" cy="1463040"/>
+          </a:xfrm>
+          <a:prstGeom prst="roundRect">
+            <a:avLst>
+              <a:gd name="adj" fmla="val 25000"/>
+            </a:avLst>
+          </a:prstGeom>
+          <a:solidFill>
+            <a:srgbClr val="C9742E"/>
+          </a:solidFill>
+          <a:ln/>
+        </p:spPr>
+      </p:sp>
+      <p:sp>
+        <p:nvSpPr>
+          <p:cNvPr id="14" name="Text 12"/>
+          <p:cNvSpPr/>
+          <p:nvPr/>
+        </p:nvSpPr>
+        <p:spPr>
+          <a:xfrm>
+            <a:off x="1170432" y="3502152"/>
+            <a:ext cx="4754880" cy="457200"/>
+          </a:xfrm>
+          <a:prstGeom prst="rect">
+            <a:avLst/>
+          </a:prstGeom>
+          <a:noFill/>
+          <a:ln/>
+        </p:spPr>
+        <p:txBody>
+          <a:bodyPr wrap="square" rtlCol="0" anchor="ctr"/>
+          <a:lstStyle/>
+          <a:p>
+            <a:pPr algn="l" indent="0" marL="0">
+              <a:buNone/>
+            </a:pPr>
+            <a:r>
+              <a:rPr lang="en-US" sz="1600" b="1" dirty="0">
+                <a:solidFill>
+                  <a:srgbClr val="C9742E"/>
+                </a:solidFill>
+              </a:rPr>
+              <a:t>外部資金の活用</a:t>
+            </a:r>
+            <a:endParaRPr lang="en-US" sz="1600" dirty="0"/>
+          </a:p>
+        </p:txBody>
+      </p:sp>
+      <p:sp>
+        <p:nvSpPr>
+          <p:cNvPr id="15" name="Text 13"/>
+          <p:cNvSpPr/>
+          <p:nvPr/>
+        </p:nvSpPr>
+        <p:spPr>
+          <a:xfrm>
+            <a:off x="1170432" y="3977640"/>
+            <a:ext cx="4754880" cy="960120"/>
+          </a:xfrm>
+          <a:prstGeom prst="rect">
+            <a:avLst/>
+          </a:prstGeom>
+          <a:noFill/>
+          <a:ln/>
+        </p:spPr>
+        <p:txBody>
+          <a:bodyPr wrap="square" rtlCol="0" anchor="t"/>
+          <a:lstStyle/>
+          <a:p>
+            <a:pPr algn="l" indent="0" marL="0">
+              <a:lnSpc>
+                <a:spcPct val="110000"/>
+              </a:lnSpc>
+              <a:buNone/>
+            </a:pPr>
+            <a:r>
+              <a:rPr lang="en-US" sz="1300" dirty="0">
+                <a:solidFill>
+                  <a:srgbClr val="36454F"/>
+                </a:solidFill>
+              </a:rPr>
+              <a:t>新事業進出補助金（サウナ展示施設）などの補助金や借入を組み合わせ、大きな設備投資をまかなう。使える制度は使う。</a:t>
+            </a:r>
+            <a:endParaRPr lang="en-US" sz="1300" dirty="0"/>
+          </a:p>
+        </p:txBody>
+      </p:sp>
+      <p:sp>
+        <p:nvSpPr>
+          <p:cNvPr id="16" name="Shape 14"/>
+          <p:cNvSpPr/>
+          <p:nvPr/>
+        </p:nvSpPr>
+        <p:spPr>
+          <a:xfrm>
+            <a:off x="6263640" y="3520440"/>
+            <a:ext cx="109728" cy="1463040"/>
+          </a:xfrm>
+          <a:prstGeom prst="roundRect">
+            <a:avLst>
+              <a:gd name="adj" fmla="val 25000"/>
+            </a:avLst>
+          </a:prstGeom>
+          <a:solidFill>
+            <a:srgbClr val="5B8C5A"/>
+          </a:solidFill>
+          <a:ln/>
+        </p:spPr>
+      </p:sp>
+      <p:sp>
+        <p:nvSpPr>
+          <p:cNvPr id="17" name="Text 15"/>
+          <p:cNvSpPr/>
+          <p:nvPr/>
+        </p:nvSpPr>
+        <p:spPr>
+          <a:xfrm>
+            <a:off x="6519672" y="3502152"/>
+            <a:ext cx="4754880" cy="457200"/>
+          </a:xfrm>
+          <a:prstGeom prst="rect">
+            <a:avLst/>
+          </a:prstGeom>
+          <a:noFill/>
+          <a:ln/>
+        </p:spPr>
+        <p:txBody>
+          <a:bodyPr wrap="square" rtlCol="0" anchor="ctr"/>
+          <a:lstStyle/>
+          <a:p>
+            <a:pPr algn="l" indent="0" marL="0">
+              <a:buNone/>
+            </a:pPr>
+            <a:r>
+              <a:rPr lang="en-US" sz="1600" b="1" dirty="0">
+                <a:solidFill>
+                  <a:srgbClr val="5B8C5A"/>
+                </a:solidFill>
+              </a:rPr>
+              <a:t>最大の資源は「人」</a:t>
+            </a:r>
+            <a:endParaRPr lang="en-US" sz="1600" dirty="0"/>
+          </a:p>
+        </p:txBody>
+      </p:sp>
+      <p:sp>
+        <p:nvSpPr>
+          <p:cNvPr id="18" name="Text 16"/>
+          <p:cNvSpPr/>
+          <p:nvPr/>
+        </p:nvSpPr>
+        <p:spPr>
+          <a:xfrm>
+            <a:off x="6519672" y="3977640"/>
+            <a:ext cx="4754880" cy="960120"/>
+          </a:xfrm>
+          <a:prstGeom prst="rect">
+            <a:avLst/>
+          </a:prstGeom>
+          <a:noFill/>
+          <a:ln/>
+        </p:spPr>
+        <p:txBody>
+          <a:bodyPr wrap="square" rtlCol="0" anchor="t"/>
+          <a:lstStyle/>
+          <a:p>
+            <a:pPr algn="l" indent="0" marL="0">
+              <a:lnSpc>
+                <a:spcPct val="110000"/>
+              </a:lnSpc>
+              <a:buNone/>
+            </a:pPr>
+            <a:r>
+              <a:rPr lang="en-US" sz="1300" dirty="0">
+                <a:solidFill>
+                  <a:srgbClr val="36454F"/>
+                </a:solidFill>
+              </a:rPr>
+              <a:t>マルチスキル化（油谷モデル）で、限られた人数を横断活用。採用と育成にも投資し、一人ひとりの力を最大化する。</a:t>
+            </a:r>
+            <a:endParaRPr lang="en-US" sz="1300" dirty="0"/>
+          </a:p>
+        </p:txBody>
+      </p:sp>
+      <p:sp>
+        <p:nvSpPr>
+          <p:cNvPr id="19" name="Text 17"/>
+          <p:cNvSpPr/>
+          <p:nvPr/>
+        </p:nvSpPr>
+        <p:spPr>
+          <a:xfrm>
+            <a:off x="914400" y="5212080"/>
+            <a:ext cx="10332720" cy="822960"/>
+          </a:xfrm>
+          <a:prstGeom prst="roundRect">
+            <a:avLst>
+              <a:gd name="adj" fmla="val 11111"/>
+            </a:avLst>
+          </a:prstGeom>
+          <a:solidFill>
+            <a:srgbClr val="36454F"/>
+          </a:solidFill>
+          <a:ln/>
+        </p:spPr>
+        <p:txBody>
+          <a:bodyPr wrap="square" rtlCol="0" anchor="ctr"/>
+          <a:lstStyle/>
+          <a:p>
+            <a:pPr algn="ctr" indent="0" marL="0">
+              <a:lnSpc>
+                <a:spcPct val="105000"/>
+              </a:lnSpc>
+              <a:buNone/>
+            </a:pPr>
+            <a:r>
+              <a:rPr lang="en-US" sz="1500" b="1" dirty="0">
+                <a:solidFill>
+                  <a:srgbClr val="FFFFFF"/>
+                </a:solidFill>
+              </a:rPr>
+              <a:t>進め方　</a:t>
+            </a:r>
+            <a:pPr algn="ctr" indent="0" marL="0">
+              <a:lnSpc>
+                <a:spcPct val="105000"/>
+              </a:lnSpc>
+              <a:buNone/>
+            </a:pPr>
+            <a:r>
+              <a:rPr lang="en-US" sz="1300" dirty="0">
+                <a:solidFill>
+                  <a:srgbClr val="EDEDEF"/>
+                </a:solidFill>
+              </a:rPr>
+              <a:t>本業のキャッシュを土台に、新規は小さく試して育てる（カフェは POPUP → クラファン → 店舗）。</a:t>
+            </a:r>
+            <a:endParaRPr lang="en-US" sz="1500" dirty="0"/>
+          </a:p>
+        </p:txBody>
+      </p:sp>
+    </p:spTree>
+  </p:cSld>
+  <p:clrMapOvr>
+    <a:masterClrMapping/>
+  </p:clrMapOvr>
+</p:sld>
+</file>
+
+<file path=ppt/slides/slide12.xml><?xml version="1.0" encoding="utf-8"?>
+<p:sld xmlns:a="http://schemas.openxmlformats.org/drawingml/2006/main" xmlns:r="http://schemas.openxmlformats.org/officeDocument/2006/relationships" xmlns:p="http://schemas.openxmlformats.org/presentationml/2006/main">
+  <p:cSld name="Slide 12">
     <p:bg>
       <p:bgPr>
         <a:solidFill>
@@ -3764,9 +4483,9 @@
 </p:sld>
 </file>
 
-<file path=ppt/slides/slide12.xml><?xml version="1.0" encoding="utf-8"?>
+<file path=ppt/slides/slide13.xml><?xml version="1.0" encoding="utf-8"?>
 <p:sld xmlns:a="http://schemas.openxmlformats.org/drawingml/2006/main" xmlns:r="http://schemas.openxmlformats.org/officeDocument/2006/relationships" xmlns:p="http://schemas.openxmlformats.org/presentationml/2006/main">
-  <p:cSld name="Slide 12">
+  <p:cSld name="Slide 13">
     <p:bg>
       <p:bgPr>
         <a:solidFill>
@@ -3935,7 +4654,7 @@
                   <a:srgbClr val="8A8A8A"/>
                 </a:solidFill>
               </a:rPr>
-              <a:t>12</a:t>
+              <a:t>13</a:t>
             </a:r>
             <a:endParaRPr lang="en-US" sz="1100" dirty="0"/>
           </a:p>
@@ -4005,7 +4724,7 @@
                   <a:srgbClr val="8A8A8A"/>
                 </a:solidFill>
               </a:rPr>
-              <a:t>技術と、誠実さと、人。25年で積み上げたものは、これからも私たちの中心です。</a:t>
+              <a:t>技術と、誠実さと、人。約30年で積み上げたものは、これからも私たちの中心です。</a:t>
             </a:r>
             <a:endParaRPr lang="en-US" sz="1400" dirty="0"/>
           </a:p>
@@ -4311,7 +5030,7 @@
                   <a:srgbClr val="2C5F2D"/>
                 </a:solidFill>
               </a:rPr>
-              <a:t>リフォーム屋として、25年で積み上げてきたもの。</a:t>
+              <a:t>リフォーム屋として、約30年で積み上げてきたもの。</a:t>
             </a:r>
             <a:endParaRPr lang="en-US" sz="2700" dirty="0"/>
           </a:p>
@@ -4423,7 +5142,7 @@
                   <a:srgbClr val="36454F"/>
                 </a:solidFill>
               </a:rPr>
-              <a:t>1998年、大和町で創業。</a:t>
+              <a:t>1997年、大和町で創業。</a:t>
             </a:r>
             <a:endParaRPr lang="en-US" sz="1400" dirty="0"/>
           </a:p>
@@ -8657,7 +9376,7 @@
                   <a:srgbClr val="36454F"/>
                 </a:solidFill>
               </a:rPr>
-              <a:t>1998　</a:t>
+              <a:t>1997　</a:t>
             </a:r>
             <a:pPr algn="l" indent="0" marL="0">
               <a:lnSpc>

--- a/光和工業_ビジョン資料.pptx
+++ b/光和工業_ビジョン資料.pptx
@@ -18,9 +18,10 @@
     <p:sldId id="266" r:id="rId12"/>
     <p:sldId id="267" r:id="rId13"/>
     <p:sldId id="268" r:id="rId14"/>
+    <p:sldId id="269" r:id="rId15"/>
   </p:sldIdLst>
   <p:notesMasterIdLst>
-    <p:notesMasterId r:id="rId15"/>
+    <p:notesMasterId r:id="rId16"/>
   </p:notesMasterIdLst>
   <p:sldSz cx="12191695" cy="6858000"/>
   <p:notesSz cx="6858000" cy="12191695"/>
@@ -908,6 +909,94 @@
 </p:notes>
 </file>
 
+<file path=ppt/notesSlides/notesSlide14.xml><?xml version="1.0" encoding="utf-8"?>
+<p:notes xmlns:a="http://schemas.openxmlformats.org/drawingml/2006/main" xmlns:r="http://schemas.openxmlformats.org/officeDocument/2006/relationships" xmlns:p="http://schemas.openxmlformats.org/presentationml/2006/main">
+  <p:cSld>
+    <p:spTree>
+      <p:nvGrpSpPr>
+        <p:cNvPr id="1" name=""/>
+        <p:cNvGrpSpPr/>
+        <p:nvPr/>
+      </p:nvGrpSpPr>
+      <p:grpSpPr>
+        <a:xfrm>
+          <a:off x="0" y="0"/>
+          <a:ext cx="0" cy="0"/>
+          <a:chOff x="0" y="0"/>
+          <a:chExt cx="0" cy="0"/>
+        </a:xfrm>
+      </p:grpSpPr>
+      <p:sp>
+        <p:nvSpPr>
+          <p:cNvPr id="2" name="Slide Image Placeholder 1"/>
+          <p:cNvSpPr>
+            <a:spLocks noGrp="1" noRot="1" noChangeAspect="1"/>
+          </p:cNvSpPr>
+          <p:nvPr>
+            <p:ph type="sldImg"/>
+          </p:nvPr>
+        </p:nvSpPr>
+        <p:spPr/>
+      </p:sp>
+      <p:sp>
+        <p:nvSpPr>
+          <p:cNvPr id="3" name="Notes Placeholder 2"/>
+          <p:cNvSpPr>
+            <a:spLocks noGrp="1"/>
+          </p:cNvSpPr>
+          <p:nvPr>
+            <p:ph type="body" idx="1"/>
+          </p:nvPr>
+        </p:nvSpPr>
+        <p:spPr/>
+        <p:txBody>
+          <a:bodyPr/>
+          <a:lstStyle/>
+          <a:p>
+            <a:r>
+              <a:rPr lang="en-US" dirty="0"/>
+              <a:t/>
+            </a:r>
+            <a:endParaRPr lang="en-US" dirty="0"/>
+          </a:p>
+        </p:txBody>
+      </p:sp>
+      <p:sp>
+        <p:nvSpPr>
+          <p:cNvPr id="4" name="Slide Number Placeholder 3"/>
+          <p:cNvSpPr>
+            <a:spLocks noGrp="1"/>
+          </p:cNvSpPr>
+          <p:nvPr>
+            <p:ph type="sldNum" sz="quarter" idx="10"/>
+          </p:nvPr>
+        </p:nvSpPr>
+        <p:spPr/>
+        <p:txBody>
+          <a:bodyPr/>
+          <a:lstStyle/>
+          <a:p>
+            <a:fld id="{F7021451-1387-4CA6-816F-3879F97B5CBC}" type="slidenum">
+              <a:rPr lang="en-US"/>
+              <a:t>14</a:t>
+            </a:fld>
+            <a:endParaRPr lang="en-US"/>
+          </a:p>
+        </p:txBody>
+      </p:sp>
+    </p:spTree>
+    <p:extLst>
+      <p:ext uri="{BB962C8B-B14F-4D97-AF65-F5344CB8AC3E}">
+        <p14:creationId xmlns:p14="http://schemas.microsoft.com/office/powerpoint/2010/main" val="1024086991"/>
+      </p:ext>
+    </p:extLst>
+  </p:cSld>
+  <p:clrMapOvr>
+    <a:masterClrMapping/>
+  </p:clrMapOvr>
+</p:notes>
+</file>
+
 <file path=ppt/notesSlides/notesSlide2.xml><?xml version="1.0" encoding="utf-8"?>
 <p:notes xmlns:a="http://schemas.openxmlformats.org/drawingml/2006/main" xmlns:r="http://schemas.openxmlformats.org/officeDocument/2006/relationships" xmlns:p="http://schemas.openxmlformats.org/presentationml/2006/main">
   <p:cSld>
@@ -4252,6 +4341,705 @@
     <p:bg>
       <p:bgPr>
         <a:solidFill>
+          <a:srgbClr val="F5F5F2"/>
+        </a:solidFill>
+      </p:bgPr>
+    </p:bg>
+    <p:spTree>
+      <p:nvGrpSpPr>
+        <p:cNvPr id="1" name=""/>
+        <p:cNvGrpSpPr/>
+        <p:nvPr/>
+      </p:nvGrpSpPr>
+      <p:grpSpPr>
+        <a:xfrm>
+          <a:off x="0" y="0"/>
+          <a:ext cx="0" cy="0"/>
+          <a:chOff x="0" y="0"/>
+          <a:chExt cx="0" cy="0"/>
+        </a:xfrm>
+      </p:grpSpPr>
+      <p:sp>
+        <p:nvSpPr>
+          <p:cNvPr id="2" name="Shape 0"/>
+          <p:cNvSpPr/>
+          <p:nvPr/>
+        </p:nvSpPr>
+        <p:spPr>
+          <a:xfrm>
+            <a:off x="502920" y="566928"/>
+            <a:ext cx="128016" cy="713232"/>
+          </a:xfrm>
+          <a:prstGeom prst="roundRect">
+            <a:avLst>
+              <a:gd name="adj" fmla="val 28571"/>
+            </a:avLst>
+          </a:prstGeom>
+          <a:solidFill>
+            <a:srgbClr val="2C5F2D"/>
+          </a:solidFill>
+          <a:ln/>
+        </p:spPr>
+      </p:sp>
+      <p:sp>
+        <p:nvSpPr>
+          <p:cNvPr id="3" name="Text 1"/>
+          <p:cNvSpPr/>
+          <p:nvPr/>
+        </p:nvSpPr>
+        <p:spPr>
+          <a:xfrm>
+            <a:off x="777240" y="530352"/>
+            <a:ext cx="10515600" cy="310896"/>
+          </a:xfrm>
+          <a:prstGeom prst="rect">
+            <a:avLst/>
+          </a:prstGeom>
+          <a:noFill/>
+          <a:ln/>
+        </p:spPr>
+        <p:txBody>
+          <a:bodyPr wrap="square" rtlCol="0" anchor="ctr"/>
+          <a:lstStyle/>
+          <a:p>
+            <a:pPr algn="l" indent="0" marL="0">
+              <a:buNone/>
+            </a:pPr>
+            <a:r>
+              <a:rPr lang="en-US" sz="1300" b="1" dirty="0">
+                <a:solidFill>
+                  <a:srgbClr val="C9742E"/>
+                </a:solidFill>
+              </a:rPr>
+              <a:t>数字の根拠（ざっくり）</a:t>
+            </a:r>
+            <a:endParaRPr lang="en-US" sz="1300" dirty="0"/>
+          </a:p>
+        </p:txBody>
+      </p:sp>
+      <p:sp>
+        <p:nvSpPr>
+          <p:cNvPr id="4" name="Text 2"/>
+          <p:cNvSpPr/>
+          <p:nvPr/>
+        </p:nvSpPr>
+        <p:spPr>
+          <a:xfrm>
+            <a:off x="749808" y="841248"/>
+            <a:ext cx="10789920" cy="640080"/>
+          </a:xfrm>
+          <a:prstGeom prst="rect">
+            <a:avLst/>
+          </a:prstGeom>
+          <a:noFill/>
+          <a:ln/>
+        </p:spPr>
+        <p:txBody>
+          <a:bodyPr wrap="square" rtlCol="0" anchor="ctr"/>
+          <a:lstStyle/>
+          <a:p>
+            <a:pPr algn="l" indent="0" marL="0">
+              <a:buNone/>
+            </a:pPr>
+            <a:r>
+              <a:rPr lang="en-US" sz="2700" b="1" dirty="0">
+                <a:solidFill>
+                  <a:srgbClr val="2C5F2D"/>
+                </a:solidFill>
+              </a:rPr>
+              <a:t>投資にまわせるお金は、どこから来るか。</a:t>
+            </a:r>
+            <a:endParaRPr lang="en-US" sz="2700" dirty="0"/>
+          </a:p>
+        </p:txBody>
+      </p:sp>
+      <p:sp>
+        <p:nvSpPr>
+          <p:cNvPr id="5" name="Shape 3"/>
+          <p:cNvSpPr/>
+          <p:nvPr/>
+        </p:nvSpPr>
+        <p:spPr>
+          <a:xfrm>
+            <a:off x="777240" y="1572768"/>
+            <a:ext cx="10607040" cy="0"/>
+          </a:xfrm>
+          <a:prstGeom prst="line">
+            <a:avLst/>
+          </a:prstGeom>
+          <a:noFill/>
+          <a:ln w="19050">
+            <a:solidFill>
+              <a:srgbClr val="D8D8D2"/>
+            </a:solidFill>
+            <a:prstDash val="solid"/>
+          </a:ln>
+        </p:spPr>
+      </p:sp>
+      <p:sp>
+        <p:nvSpPr>
+          <p:cNvPr id="6" name="Text 4"/>
+          <p:cNvSpPr/>
+          <p:nvPr/>
+        </p:nvSpPr>
+        <p:spPr>
+          <a:xfrm>
+            <a:off x="11155680" y="6382512"/>
+            <a:ext cx="822960" cy="310896"/>
+          </a:xfrm>
+          <a:prstGeom prst="rect">
+            <a:avLst/>
+          </a:prstGeom>
+          <a:noFill/>
+          <a:ln/>
+        </p:spPr>
+        <p:txBody>
+          <a:bodyPr wrap="square" rtlCol="0" anchor="ctr"/>
+          <a:lstStyle/>
+          <a:p>
+            <a:pPr algn="r" indent="0" marL="0">
+              <a:buNone/>
+            </a:pPr>
+            <a:r>
+              <a:rPr lang="en-US" sz="1100" dirty="0">
+                <a:solidFill>
+                  <a:srgbClr val="8A8A8A"/>
+                </a:solidFill>
+              </a:rPr>
+              <a:t>12</a:t>
+            </a:r>
+            <a:endParaRPr lang="en-US" sz="1100" dirty="0"/>
+          </a:p>
+        </p:txBody>
+      </p:sp>
+      <p:sp>
+        <p:nvSpPr>
+          <p:cNvPr id="7" name="Text 5"/>
+          <p:cNvSpPr/>
+          <p:nvPr/>
+        </p:nvSpPr>
+        <p:spPr>
+          <a:xfrm>
+            <a:off x="914400" y="1920240"/>
+            <a:ext cx="2971800" cy="1051560"/>
+          </a:xfrm>
+          <a:prstGeom prst="roundRect">
+            <a:avLst>
+              <a:gd name="adj" fmla="val 8696"/>
+            </a:avLst>
+          </a:prstGeom>
+          <a:solidFill>
+            <a:srgbClr val="36454F"/>
+          </a:solidFill>
+          <a:ln/>
+        </p:spPr>
+        <p:txBody>
+          <a:bodyPr wrap="square" rtlCol="0" anchor="ctr"/>
+          <a:lstStyle/>
+          <a:p>
+            <a:pPr algn="ctr" indent="0" marL="0">
+              <a:lnSpc>
+                <a:spcPct val="100000"/>
+              </a:lnSpc>
+              <a:buNone/>
+            </a:pPr>
+            <a:r>
+              <a:rPr lang="en-US" sz="1100" b="1" dirty="0">
+                <a:solidFill>
+                  <a:srgbClr val="D8DDE0"/>
+                </a:solidFill>
+              </a:rPr>
+              <a:t>手元資金（現預金）</a:t>
+            </a:r>
+            <a:endParaRPr lang="en-US" sz="1100" dirty="0"/>
+          </a:p>
+          <a:p>
+            <a:pPr algn="ctr" indent="0" marL="0">
+              <a:lnSpc>
+                <a:spcPct val="100000"/>
+              </a:lnSpc>
+              <a:buNone/>
+            </a:pPr>
+            <a:r>
+              <a:rPr lang="en-US" sz="2000" b="1" dirty="0">
+                <a:solidFill>
+                  <a:srgbClr val="FFFFFF"/>
+                </a:solidFill>
+              </a:rPr>
+              <a:t>約7,800万円</a:t>
+            </a:r>
+            <a:endParaRPr lang="en-US" sz="1100" dirty="0"/>
+          </a:p>
+        </p:txBody>
+      </p:sp>
+      <p:sp>
+        <p:nvSpPr>
+          <p:cNvPr id="8" name="Text 6"/>
+          <p:cNvSpPr/>
+          <p:nvPr/>
+        </p:nvSpPr>
+        <p:spPr>
+          <a:xfrm>
+            <a:off x="3931920" y="1920240"/>
+            <a:ext cx="502920" cy="1051560"/>
+          </a:xfrm>
+          <a:prstGeom prst="rect">
+            <a:avLst/>
+          </a:prstGeom>
+          <a:noFill/>
+          <a:ln/>
+        </p:spPr>
+        <p:txBody>
+          <a:bodyPr wrap="square" rtlCol="0" anchor="ctr"/>
+          <a:lstStyle/>
+          <a:p>
+            <a:pPr algn="ctr" indent="0" marL="0">
+              <a:buNone/>
+            </a:pPr>
+            <a:r>
+              <a:rPr lang="en-US" sz="2600" b="1" dirty="0">
+                <a:solidFill>
+                  <a:srgbClr val="36454F"/>
+                </a:solidFill>
+              </a:rPr>
+              <a:t>−</a:t>
+            </a:r>
+            <a:endParaRPr lang="en-US" sz="2600" dirty="0"/>
+          </a:p>
+        </p:txBody>
+      </p:sp>
+      <p:sp>
+        <p:nvSpPr>
+          <p:cNvPr id="9" name="Text 7"/>
+          <p:cNvSpPr/>
+          <p:nvPr/>
+        </p:nvSpPr>
+        <p:spPr>
+          <a:xfrm>
+            <a:off x="4480560" y="1920240"/>
+            <a:ext cx="2971800" cy="1051560"/>
+          </a:xfrm>
+          <a:prstGeom prst="roundRect">
+            <a:avLst>
+              <a:gd name="adj" fmla="val 8696"/>
+            </a:avLst>
+          </a:prstGeom>
+          <a:solidFill>
+            <a:srgbClr val="C9742E"/>
+          </a:solidFill>
+          <a:ln/>
+        </p:spPr>
+        <p:txBody>
+          <a:bodyPr wrap="square" rtlCol="0" anchor="ctr"/>
+          <a:lstStyle/>
+          <a:p>
+            <a:pPr algn="ctr" indent="0" marL="0">
+              <a:lnSpc>
+                <a:spcPct val="100000"/>
+              </a:lnSpc>
+              <a:buNone/>
+            </a:pPr>
+            <a:r>
+              <a:rPr lang="en-US" sz="1100" b="1" dirty="0">
+                <a:solidFill>
+                  <a:srgbClr val="FBEAD9"/>
+                </a:solidFill>
+              </a:rPr>
+              <a:t>近く払うお金</a:t>
+            </a:r>
+            <a:endParaRPr lang="en-US" sz="1100" dirty="0"/>
+          </a:p>
+          <a:p>
+            <a:pPr algn="ctr" indent="0" marL="0">
+              <a:lnSpc>
+                <a:spcPct val="100000"/>
+              </a:lnSpc>
+              <a:buNone/>
+            </a:pPr>
+            <a:r>
+              <a:rPr lang="en-US" sz="2000" b="1" dirty="0">
+                <a:solidFill>
+                  <a:srgbClr val="FFFFFF"/>
+                </a:solidFill>
+              </a:rPr>
+              <a:t>約4,080万円</a:t>
+            </a:r>
+            <a:endParaRPr lang="en-US" sz="1100" dirty="0"/>
+          </a:p>
+          <a:p>
+            <a:pPr algn="ctr" indent="0" marL="0">
+              <a:lnSpc>
+                <a:spcPct val="100000"/>
+              </a:lnSpc>
+              <a:buNone/>
+            </a:pPr>
+            <a:r>
+              <a:rPr lang="en-US" sz="850" dirty="0">
+                <a:solidFill>
+                  <a:srgbClr val="FBEAD9"/>
+                </a:solidFill>
+              </a:rPr>
+              <a:t>買掛・未払・短期借入 など</a:t>
+            </a:r>
+            <a:endParaRPr lang="en-US" sz="1100" dirty="0"/>
+          </a:p>
+        </p:txBody>
+      </p:sp>
+      <p:sp>
+        <p:nvSpPr>
+          <p:cNvPr id="10" name="Text 8"/>
+          <p:cNvSpPr/>
+          <p:nvPr/>
+        </p:nvSpPr>
+        <p:spPr>
+          <a:xfrm>
+            <a:off x="7498080" y="1920240"/>
+            <a:ext cx="502920" cy="1051560"/>
+          </a:xfrm>
+          <a:prstGeom prst="rect">
+            <a:avLst/>
+          </a:prstGeom>
+          <a:noFill/>
+          <a:ln/>
+        </p:spPr>
+        <p:txBody>
+          <a:bodyPr wrap="square" rtlCol="0" anchor="ctr"/>
+          <a:lstStyle/>
+          <a:p>
+            <a:pPr algn="ctr" indent="0" marL="0">
+              <a:buNone/>
+            </a:pPr>
+            <a:r>
+              <a:rPr lang="en-US" sz="2400" b="1" dirty="0">
+                <a:solidFill>
+                  <a:srgbClr val="2C5F2D"/>
+                </a:solidFill>
+              </a:rPr>
+              <a:t>＝</a:t>
+            </a:r>
+            <a:endParaRPr lang="en-US" sz="2400" dirty="0"/>
+          </a:p>
+        </p:txBody>
+      </p:sp>
+      <p:sp>
+        <p:nvSpPr>
+          <p:cNvPr id="11" name="Text 9"/>
+          <p:cNvSpPr/>
+          <p:nvPr/>
+        </p:nvSpPr>
+        <p:spPr>
+          <a:xfrm>
+            <a:off x="8046720" y="1920240"/>
+            <a:ext cx="3200400" cy="1051560"/>
+          </a:xfrm>
+          <a:prstGeom prst="roundRect">
+            <a:avLst>
+              <a:gd name="adj" fmla="val 8696"/>
+            </a:avLst>
+          </a:prstGeom>
+          <a:solidFill>
+            <a:srgbClr val="2C5F2D"/>
+          </a:solidFill>
+          <a:ln/>
+        </p:spPr>
+        <p:txBody>
+          <a:bodyPr wrap="square" rtlCol="0" anchor="ctr"/>
+          <a:lstStyle/>
+          <a:p>
+            <a:pPr algn="ctr" indent="0" marL="0">
+              <a:lnSpc>
+                <a:spcPct val="100000"/>
+              </a:lnSpc>
+              <a:buNone/>
+            </a:pPr>
+            <a:r>
+              <a:rPr lang="en-US" sz="1100" b="1" dirty="0">
+                <a:solidFill>
+                  <a:srgbClr val="CFE3CF"/>
+                </a:solidFill>
+              </a:rPr>
+              <a:t>当座の余裕</a:t>
+            </a:r>
+            <a:endParaRPr lang="en-US" sz="1100" dirty="0"/>
+          </a:p>
+          <a:p>
+            <a:pPr algn="ctr" indent="0" marL="0">
+              <a:lnSpc>
+                <a:spcPct val="100000"/>
+              </a:lnSpc>
+              <a:buNone/>
+            </a:pPr>
+            <a:r>
+              <a:rPr lang="en-US" sz="2200" b="1" dirty="0">
+                <a:solidFill>
+                  <a:srgbClr val="FFFFFF"/>
+                </a:solidFill>
+              </a:rPr>
+              <a:t>約3,700万円</a:t>
+            </a:r>
+            <a:endParaRPr lang="en-US" sz="1100" dirty="0"/>
+          </a:p>
+        </p:txBody>
+      </p:sp>
+      <p:sp>
+        <p:nvSpPr>
+          <p:cNvPr id="12" name="Text 10"/>
+          <p:cNvSpPr/>
+          <p:nvPr/>
+        </p:nvSpPr>
+        <p:spPr>
+          <a:xfrm>
+            <a:off x="914400" y="3246120"/>
+            <a:ext cx="10332720" cy="1051560"/>
+          </a:xfrm>
+          <a:prstGeom prst="roundRect">
+            <a:avLst>
+              <a:gd name="adj" fmla="val 8696"/>
+            </a:avLst>
+          </a:prstGeom>
+          <a:solidFill>
+            <a:srgbClr val="FFFFFF"/>
+          </a:solidFill>
+          <a:ln w="25400">
+            <a:solidFill>
+              <a:srgbClr val="1C7293"/>
+            </a:solidFill>
+          </a:ln>
+        </p:spPr>
+        <p:txBody>
+          <a:bodyPr wrap="square" rtlCol="0" anchor="ctr"/>
+          <a:lstStyle/>
+          <a:p>
+            <a:pPr algn="ctr" indent="0" marL="0">
+              <a:lnSpc>
+                <a:spcPct val="100000"/>
+              </a:lnSpc>
+              <a:buNone/>
+            </a:pPr>
+            <a:r>
+              <a:rPr lang="en-US" sz="1400" b="1" dirty="0">
+                <a:solidFill>
+                  <a:srgbClr val="36454F"/>
+                </a:solidFill>
+              </a:rPr>
+              <a:t>毎年あらたに生まれる投資余力　</a:t>
+            </a:r>
+            <a:pPr algn="ctr" indent="0" marL="0">
+              <a:lnSpc>
+                <a:spcPct val="100000"/>
+              </a:lnSpc>
+              <a:buNone/>
+            </a:pPr>
+            <a:r>
+              <a:rPr lang="en-US" sz="2200" b="1" dirty="0">
+                <a:solidFill>
+                  <a:srgbClr val="1C7293"/>
+                </a:solidFill>
+              </a:rPr>
+              <a:t>約3,000万円／年</a:t>
+            </a:r>
+            <a:endParaRPr lang="en-US" sz="1400" dirty="0"/>
+          </a:p>
+          <a:p>
+            <a:pPr algn="ctr" indent="0" marL="0">
+              <a:lnSpc>
+                <a:spcPct val="100000"/>
+              </a:lnSpc>
+              <a:buNone/>
+            </a:pPr>
+            <a:r>
+              <a:rPr lang="en-US" sz="1100" dirty="0">
+                <a:solidFill>
+                  <a:srgbClr val="8A8A8A"/>
+                </a:solidFill>
+              </a:rPr>
+              <a:t>本業の利益 約700万 ＋ 減価償却 約2,460万（毎年つくり出せるお金）</a:t>
+            </a:r>
+            <a:endParaRPr lang="en-US" sz="1400" dirty="0"/>
+          </a:p>
+        </p:txBody>
+      </p:sp>
+      <p:sp>
+        <p:nvSpPr>
+          <p:cNvPr id="13" name="Text 11"/>
+          <p:cNvSpPr/>
+          <p:nvPr/>
+        </p:nvSpPr>
+        <p:spPr>
+          <a:xfrm>
+            <a:off x="914400" y="4572000"/>
+            <a:ext cx="5074920" cy="1051560"/>
+          </a:xfrm>
+          <a:prstGeom prst="roundRect">
+            <a:avLst>
+              <a:gd name="adj" fmla="val 8696"/>
+            </a:avLst>
+          </a:prstGeom>
+          <a:solidFill>
+            <a:srgbClr val="FFFFFF"/>
+          </a:solidFill>
+          <a:ln w="12700">
+            <a:solidFill>
+              <a:srgbClr val="E0E0DA"/>
+            </a:solidFill>
+          </a:ln>
+        </p:spPr>
+        <p:txBody>
+          <a:bodyPr wrap="square" rtlCol="0" anchor="ctr"/>
+          <a:lstStyle/>
+          <a:p>
+            <a:pPr algn="ctr" indent="0" marL="0">
+              <a:lnSpc>
+                <a:spcPct val="100000"/>
+              </a:lnSpc>
+              <a:buNone/>
+            </a:pPr>
+            <a:r>
+              <a:rPr lang="en-US" sz="1300" b="1" dirty="0">
+                <a:solidFill>
+                  <a:srgbClr val="5B8C5A"/>
+                </a:solidFill>
+              </a:rPr>
+              <a:t>予備：保険積立金 約3,000万円</a:t>
+            </a:r>
+            <a:endParaRPr lang="en-US" sz="1300" dirty="0"/>
+          </a:p>
+          <a:p>
+            <a:pPr algn="ctr" indent="0" marL="0">
+              <a:lnSpc>
+                <a:spcPct val="100000"/>
+              </a:lnSpc>
+              <a:buNone/>
+            </a:pPr>
+            <a:r>
+              <a:rPr lang="en-US" sz="1000" dirty="0">
+                <a:solidFill>
+                  <a:srgbClr val="36454F"/>
+                </a:solidFill>
+              </a:rPr>
+              <a:t>解約・契約者貸付で、いざという時の原資に</a:t>
+            </a:r>
+            <a:endParaRPr lang="en-US" sz="1300" dirty="0"/>
+          </a:p>
+        </p:txBody>
+      </p:sp>
+      <p:sp>
+        <p:nvSpPr>
+          <p:cNvPr id="14" name="Text 12"/>
+          <p:cNvSpPr/>
+          <p:nvPr/>
+        </p:nvSpPr>
+        <p:spPr>
+          <a:xfrm>
+            <a:off x="6172200" y="4572000"/>
+            <a:ext cx="5074920" cy="1051560"/>
+          </a:xfrm>
+          <a:prstGeom prst="roundRect">
+            <a:avLst>
+              <a:gd name="adj" fmla="val 8696"/>
+            </a:avLst>
+          </a:prstGeom>
+          <a:solidFill>
+            <a:srgbClr val="FFFFFF"/>
+          </a:solidFill>
+          <a:ln w="12700">
+            <a:solidFill>
+              <a:srgbClr val="E0E0DA"/>
+            </a:solidFill>
+          </a:ln>
+        </p:spPr>
+        <p:txBody>
+          <a:bodyPr wrap="square" rtlCol="0" anchor="ctr"/>
+          <a:lstStyle/>
+          <a:p>
+            <a:pPr algn="ctr" indent="0" marL="0">
+              <a:lnSpc>
+                <a:spcPct val="100000"/>
+              </a:lnSpc>
+              <a:buNone/>
+            </a:pPr>
+            <a:r>
+              <a:rPr lang="en-US" sz="1300" b="1" dirty="0">
+                <a:solidFill>
+                  <a:srgbClr val="B07A3E"/>
+                </a:solidFill>
+              </a:rPr>
+              <a:t>売掛金 約4,400万円</a:t>
+            </a:r>
+            <a:endParaRPr lang="en-US" sz="1300" dirty="0"/>
+          </a:p>
+          <a:p>
+            <a:pPr algn="ctr" indent="0" marL="0">
+              <a:lnSpc>
+                <a:spcPct val="100000"/>
+              </a:lnSpc>
+              <a:buNone/>
+            </a:pPr>
+            <a:r>
+              <a:rPr lang="en-US" sz="1000" dirty="0">
+                <a:solidFill>
+                  <a:srgbClr val="36454F"/>
+                </a:solidFill>
+              </a:rPr>
+              <a:t>まだ未回収＝これから入ってくるお金</a:t>
+            </a:r>
+            <a:endParaRPr lang="en-US" sz="1300" dirty="0"/>
+          </a:p>
+        </p:txBody>
+      </p:sp>
+      <p:sp>
+        <p:nvSpPr>
+          <p:cNvPr id="15" name="Text 13"/>
+          <p:cNvSpPr/>
+          <p:nvPr/>
+        </p:nvSpPr>
+        <p:spPr>
+          <a:xfrm>
+            <a:off x="914400" y="5870448"/>
+            <a:ext cx="10332720" cy="457200"/>
+          </a:xfrm>
+          <a:prstGeom prst="rect">
+            <a:avLst/>
+          </a:prstGeom>
+          <a:noFill/>
+          <a:ln/>
+        </p:spPr>
+        <p:txBody>
+          <a:bodyPr wrap="square" rtlCol="0" anchor="ctr"/>
+          <a:lstStyle/>
+          <a:p>
+            <a:pPr algn="ctr" indent="0" marL="0">
+              <a:lnSpc>
+                <a:spcPct val="100000"/>
+              </a:lnSpc>
+              <a:buNone/>
+            </a:pPr>
+            <a:r>
+              <a:rPr lang="en-US" sz="1000" i="1" dirty="0">
+                <a:solidFill>
+                  <a:srgbClr val="8A8A8A"/>
+                </a:solidFill>
+              </a:rPr>
+              <a:t>※第26期決算（R6.7〜R7.6）からの概算。定期預金の担保の有無・預金の内訳は通帳／勘定科目内訳明細書で要確認。</a:t>
+            </a:r>
+            <a:endParaRPr lang="en-US" sz="1000" dirty="0"/>
+          </a:p>
+        </p:txBody>
+      </p:sp>
+    </p:spTree>
+  </p:cSld>
+  <p:clrMapOvr>
+    <a:masterClrMapping/>
+  </p:clrMapOvr>
+</p:sld>
+</file>
+
+<file path=ppt/slides/slide13.xml><?xml version="1.0" encoding="utf-8"?>
+<p:sld xmlns:a="http://schemas.openxmlformats.org/drawingml/2006/main" xmlns:r="http://schemas.openxmlformats.org/officeDocument/2006/relationships" xmlns:p="http://schemas.openxmlformats.org/presentationml/2006/main">
+  <p:cSld name="Slide 13">
+    <p:bg>
+      <p:bgPr>
+        <a:solidFill>
           <a:srgbClr val="2C5F2D"/>
         </a:solidFill>
       </p:bgPr>
@@ -4483,9 +5271,9 @@
 </p:sld>
 </file>
 
-<file path=ppt/slides/slide13.xml><?xml version="1.0" encoding="utf-8"?>
+<file path=ppt/slides/slide14.xml><?xml version="1.0" encoding="utf-8"?>
 <p:sld xmlns:a="http://schemas.openxmlformats.org/drawingml/2006/main" xmlns:r="http://schemas.openxmlformats.org/officeDocument/2006/relationships" xmlns:p="http://schemas.openxmlformats.org/presentationml/2006/main">
-  <p:cSld name="Slide 13">
+  <p:cSld name="Slide 14">
     <p:bg>
       <p:bgPr>
         <a:solidFill>
@@ -4654,7 +5442,7 @@
                   <a:srgbClr val="8A8A8A"/>
                 </a:solidFill>
               </a:rPr>
-              <a:t>13</a:t>
+              <a:t>14</a:t>
             </a:r>
             <a:endParaRPr lang="en-US" sz="1100" dirty="0"/>
           </a:p>
